--- a/public/lessons/year-6-maths/summer/week-22/represent-word-problems-with-equations/teaching-powerpoint-v1.pptx
+++ b/public/lessons/year-6-maths/summer/week-22/represent-word-problems-with-equations/teaching-powerpoint-v1.pptx
@@ -2,24 +2,24 @@
 <file path=ppt/presentation.xml><?xml version="1.0" encoding="utf-8"?>
 <p:presentation xmlns:p="http://schemas.openxmlformats.org/presentationml/2006/main">
   <p:sldMasterIdLst>
-    <p:sldMasterId xmlns:r="http://schemas.openxmlformats.org/officeDocument/2006/relationships" id="2147483648" r:id="R6c5a1490a37440cd"/>
+    <p:sldMasterId xmlns:r="http://schemas.openxmlformats.org/officeDocument/2006/relationships" id="2147483648" r:id="Rb51f5e450b444347"/>
   </p:sldMasterIdLst>
   <p:notesMasterIdLst>
-    <p:notesMasterId xmlns:r="http://schemas.openxmlformats.org/officeDocument/2006/relationships" r:id="R9cf6d35555034edb"/>
+    <p:notesMasterId xmlns:r="http://schemas.openxmlformats.org/officeDocument/2006/relationships" r:id="R68777fabd0fb438c"/>
   </p:notesMasterIdLst>
   <p:sldIdLst>
-    <p:sldId xmlns:r="http://schemas.openxmlformats.org/officeDocument/2006/relationships" id="256" r:id="Rd02daf28a6a448c2"/>
-    <p:sldId xmlns:r="http://schemas.openxmlformats.org/officeDocument/2006/relationships" id="257" r:id="Rf2d5ceb66b364db8"/>
-    <p:sldId xmlns:r="http://schemas.openxmlformats.org/officeDocument/2006/relationships" id="258" r:id="R7110947dd87c4ed8"/>
-    <p:sldId xmlns:r="http://schemas.openxmlformats.org/officeDocument/2006/relationships" id="259" r:id="Rcdd54b2f3a914656"/>
-    <p:sldId xmlns:r="http://schemas.openxmlformats.org/officeDocument/2006/relationships" id="260" r:id="Ref32a23e83014c76"/>
-    <p:sldId xmlns:r="http://schemas.openxmlformats.org/officeDocument/2006/relationships" id="261" r:id="R2600dbef57a941c7"/>
-    <p:sldId xmlns:r="http://schemas.openxmlformats.org/officeDocument/2006/relationships" id="262" r:id="R375f1e6536ad438f"/>
-    <p:sldId xmlns:r="http://schemas.openxmlformats.org/officeDocument/2006/relationships" id="263" r:id="Rcb8d271133324cf6"/>
-    <p:sldId xmlns:r="http://schemas.openxmlformats.org/officeDocument/2006/relationships" id="264" r:id="R3caabc5740df4b74"/>
-    <p:sldId xmlns:r="http://schemas.openxmlformats.org/officeDocument/2006/relationships" id="265" r:id="R851873b6737748cc"/>
-    <p:sldId xmlns:r="http://schemas.openxmlformats.org/officeDocument/2006/relationships" id="266" r:id="Rfe22e8daff48454f"/>
-    <p:sldId xmlns:r="http://schemas.openxmlformats.org/officeDocument/2006/relationships" id="267" r:id="R4ab028f65e1c43f6"/>
+    <p:sldId xmlns:r="http://schemas.openxmlformats.org/officeDocument/2006/relationships" id="256" r:id="R408c83a042af4309"/>
+    <p:sldId xmlns:r="http://schemas.openxmlformats.org/officeDocument/2006/relationships" id="257" r:id="R8207b474ca704334"/>
+    <p:sldId xmlns:r="http://schemas.openxmlformats.org/officeDocument/2006/relationships" id="258" r:id="R57e8a745ee384921"/>
+    <p:sldId xmlns:r="http://schemas.openxmlformats.org/officeDocument/2006/relationships" id="259" r:id="Rf0f7cad814184e18"/>
+    <p:sldId xmlns:r="http://schemas.openxmlformats.org/officeDocument/2006/relationships" id="260" r:id="R06110ea4aacf4e5e"/>
+    <p:sldId xmlns:r="http://schemas.openxmlformats.org/officeDocument/2006/relationships" id="261" r:id="R51bef384694040f2"/>
+    <p:sldId xmlns:r="http://schemas.openxmlformats.org/officeDocument/2006/relationships" id="262" r:id="R4f8b2cfdc1c44a0b"/>
+    <p:sldId xmlns:r="http://schemas.openxmlformats.org/officeDocument/2006/relationships" id="263" r:id="R33aa0c126d4a4bc8"/>
+    <p:sldId xmlns:r="http://schemas.openxmlformats.org/officeDocument/2006/relationships" id="264" r:id="R6e5f3bb411f248ec"/>
+    <p:sldId xmlns:r="http://schemas.openxmlformats.org/officeDocument/2006/relationships" id="265" r:id="Ra77be239a48e484c"/>
+    <p:sldId xmlns:r="http://schemas.openxmlformats.org/officeDocument/2006/relationships" id="266" r:id="R793136b3311b4352"/>
+    <p:sldId xmlns:r="http://schemas.openxmlformats.org/officeDocument/2006/relationships" id="267" r:id="Rd80515d8255744c0"/>
   </p:sldIdLst>
   <p:sldSz cx="12192000" cy="6858000"/>
   <p:notesSz cx="6858000" cy="9144000"/>
@@ -873,7 +873,7 @@
           <a:lstStyle xmlns:a="http://schemas.openxmlformats.org/drawingml/2006/main"/>
           <a:p xmlns:a="http://schemas.openxmlformats.org/drawingml/2006/main">
             <a:r>
-              <a:t>I do. Reveal the question, setup and each calculation stage one click at a time. Pupils watch before copying. Model answer: 17.</a:t>
+              <a:t>I do. Reveal the question, then reveal each mathematical change one click at a time. Point to the numbers and operation that changed before moving to the next line. Final answer: 17.</a:t>
             </a:r>
           </a:p>
         </p:txBody>
@@ -1291,7 +1291,7 @@
   </p:cSld>
   <p:clrMap bg1="lt1" tx1="dk1" bg2="lt2" tx2="dk2" accent1="accent1" accent2="accent2" accent3="accent3" accent4="accent4" accent5="accent5" accent6="accent6" hlink="hlink" folHlink="folHlink"/>
   <p:sldLayoutIdLst>
-    <p:sldLayoutId xmlns:r="http://schemas.openxmlformats.org/officeDocument/2006/relationships" id="2147483649" r:id="Re732941868e44821"/>
+    <p:sldLayoutId xmlns:r="http://schemas.openxmlformats.org/officeDocument/2006/relationships" id="2147483649" r:id="Rc4e0dd31e1864bfb"/>
   </p:sldLayoutIdLst>
   <p:txStyles>
     <p:titleStyle>
@@ -1842,7 +1842,7 @@
           <p:cNvPr id="12" name="">
             <a:extLst xmlns:a="http://schemas.openxmlformats.org/drawingml/2006/main">
               <a:ext uri="{FF2B5EF4-FFF2-40B4-BE49-F238E27FC236}">
-                <a16:creationId xmlns:a16="http://schemas.microsoft.com/office/drawing/2014/main" id="{F02084DC-06EF-4402-8B95-87ABE2350F93}"/>
+                <a16:creationId xmlns:a16="http://schemas.microsoft.com/office/drawing/2014/main" id="{572FFF2D-6DA3-4B2D-BE0A-F5AFF44DEFC2}"/>
               </a:ext>
             </a:extLst>
           </p:cNvPr>
@@ -1874,7 +1874,7 @@
           <p:cNvPr id="2" name="">
             <a:extLst xmlns:a="http://schemas.openxmlformats.org/drawingml/2006/main">
               <a:ext uri="{FF2B5EF4-FFF2-40B4-BE49-F238E27FC236}">
-                <a16:creationId xmlns:a16="http://schemas.microsoft.com/office/drawing/2014/main" id="{4D9B6389-8623-44A9-865D-F6BC54B67E5E}"/>
+                <a16:creationId xmlns:a16="http://schemas.microsoft.com/office/drawing/2014/main" id="{EBF2459F-A366-4324-8F90-55A34186BFBE}"/>
               </a:ext>
             </a:extLst>
           </p:cNvPr>
@@ -1931,7 +1931,7 @@
           <p:cNvPr id="3" name="">
             <a:extLst xmlns:a="http://schemas.openxmlformats.org/drawingml/2006/main">
               <a:ext uri="{FF2B5EF4-FFF2-40B4-BE49-F238E27FC236}">
-                <a16:creationId xmlns:a16="http://schemas.microsoft.com/office/drawing/2014/main" id="{D2E25FA4-D1F2-441D-8AA8-4FCD0A80DAE6}"/>
+                <a16:creationId xmlns:a16="http://schemas.microsoft.com/office/drawing/2014/main" id="{5825ECDC-8605-47F4-9199-778BF4B3087B}"/>
               </a:ext>
             </a:extLst>
           </p:cNvPr>
@@ -1965,7 +1965,7 @@
           <p:cNvPr id="4" name="">
             <a:extLst xmlns:a="http://schemas.openxmlformats.org/drawingml/2006/main">
               <a:ext uri="{FF2B5EF4-FFF2-40B4-BE49-F238E27FC236}">
-                <a16:creationId xmlns:a16="http://schemas.microsoft.com/office/drawing/2014/main" id="{F0EEDFD5-8AE3-44C0-9815-59E70F8B262C}"/>
+                <a16:creationId xmlns:a16="http://schemas.microsoft.com/office/drawing/2014/main" id="{CAB9C3AC-F962-404B-84B4-235264596647}"/>
               </a:ext>
             </a:extLst>
           </p:cNvPr>
@@ -2022,7 +2022,7 @@
           <p:cNvPr id="5" name="">
             <a:extLst xmlns:a="http://schemas.openxmlformats.org/drawingml/2006/main">
               <a:ext uri="{FF2B5EF4-FFF2-40B4-BE49-F238E27FC236}">
-                <a16:creationId xmlns:a16="http://schemas.microsoft.com/office/drawing/2014/main" id="{DD561C64-E8AF-441A-8E54-6827F3F6CD14}"/>
+                <a16:creationId xmlns:a16="http://schemas.microsoft.com/office/drawing/2014/main" id="{5857450D-08B7-4D9E-AF90-8CB457E62A13}"/>
               </a:ext>
             </a:extLst>
           </p:cNvPr>
@@ -2079,7 +2079,7 @@
           <p:cNvPr id="6" name="">
             <a:extLst xmlns:a="http://schemas.openxmlformats.org/drawingml/2006/main">
               <a:ext uri="{FF2B5EF4-FFF2-40B4-BE49-F238E27FC236}">
-                <a16:creationId xmlns:a16="http://schemas.microsoft.com/office/drawing/2014/main" id="{116F8815-3551-46D6-91EA-9C509905D3C2}"/>
+                <a16:creationId xmlns:a16="http://schemas.microsoft.com/office/drawing/2014/main" id="{0D3F051B-18E8-435E-8042-8FD4E0A0B1FD}"/>
               </a:ext>
             </a:extLst>
           </p:cNvPr>
@@ -2113,7 +2113,7 @@
           <p:cNvPr id="7" name="">
             <a:extLst xmlns:a="http://schemas.openxmlformats.org/drawingml/2006/main">
               <a:ext uri="{FF2B5EF4-FFF2-40B4-BE49-F238E27FC236}">
-                <a16:creationId xmlns:a16="http://schemas.microsoft.com/office/drawing/2014/main" id="{4DB18036-A4F2-44A8-B03C-17BEE8D5FD84}"/>
+                <a16:creationId xmlns:a16="http://schemas.microsoft.com/office/drawing/2014/main" id="{03A16953-6A19-48C3-9ADD-FEBE2ADA7FC3}"/>
               </a:ext>
             </a:extLst>
           </p:cNvPr>
@@ -2170,7 +2170,7 @@
           <p:cNvPr id="8" name="">
             <a:extLst xmlns:a="http://schemas.openxmlformats.org/drawingml/2006/main">
               <a:ext uri="{FF2B5EF4-FFF2-40B4-BE49-F238E27FC236}">
-                <a16:creationId xmlns:a16="http://schemas.microsoft.com/office/drawing/2014/main" id="{36518088-2EEE-4155-B2F4-89D22D83A998}"/>
+                <a16:creationId xmlns:a16="http://schemas.microsoft.com/office/drawing/2014/main" id="{F763088B-1517-49B2-BB13-C949FE962636}"/>
               </a:ext>
             </a:extLst>
           </p:cNvPr>
@@ -2227,7 +2227,7 @@
           <p:cNvPr id="9" name="">
             <a:extLst xmlns:a="http://schemas.openxmlformats.org/drawingml/2006/main">
               <a:ext uri="{FF2B5EF4-FFF2-40B4-BE49-F238E27FC236}">
-                <a16:creationId xmlns:a16="http://schemas.microsoft.com/office/drawing/2014/main" id="{8B50105E-4DA3-428E-8D12-64A4B089BA44}"/>
+                <a16:creationId xmlns:a16="http://schemas.microsoft.com/office/drawing/2014/main" id="{3A85538D-5A19-45A2-9C3E-D244D4356167}"/>
               </a:ext>
             </a:extLst>
           </p:cNvPr>
@@ -2284,7 +2284,7 @@
           <p:cNvPr id="10" name="">
             <a:extLst xmlns:a="http://schemas.openxmlformats.org/drawingml/2006/main">
               <a:ext uri="{FF2B5EF4-FFF2-40B4-BE49-F238E27FC236}">
-                <a16:creationId xmlns:a16="http://schemas.microsoft.com/office/drawing/2014/main" id="{67685F09-09D1-43D2-B8CD-C0F113B28AFE}"/>
+                <a16:creationId xmlns:a16="http://schemas.microsoft.com/office/drawing/2014/main" id="{D68260C3-B22B-4965-9F66-41086BCDB16C}"/>
               </a:ext>
             </a:extLst>
           </p:cNvPr>
@@ -2341,7 +2341,7 @@
           <p:cNvPr id="11" name="">
             <a:extLst xmlns:a="http://schemas.openxmlformats.org/drawingml/2006/main">
               <a:ext uri="{FF2B5EF4-FFF2-40B4-BE49-F238E27FC236}">
-                <a16:creationId xmlns:a16="http://schemas.microsoft.com/office/drawing/2014/main" id="{01FAFBAB-1A6F-4E80-AD3B-473BD102672B}"/>
+                <a16:creationId xmlns:a16="http://schemas.microsoft.com/office/drawing/2014/main" id="{5FB927C0-DDBE-4448-AD2C-402B7D3FA77B}"/>
               </a:ext>
             </a:extLst>
           </p:cNvPr>
@@ -2396,7 +2396,7 @@
     </p:spTree>
     <p:extLst>
       <p:ext uri="{BB962C8B-B14F-4D97-AF65-F5344CB8AC3E}">
-        <p14:creationId xmlns:p14="http://schemas.microsoft.com/office/powerpoint/2010/main" val="478054076"/>
+        <p14:creationId xmlns:p14="http://schemas.microsoft.com/office/powerpoint/2010/main" val="295631853"/>
       </p:ext>
     </p:extLst>
   </p:cSld>
@@ -2427,7 +2427,7 @@
           <p:cNvPr id="14" name="">
             <a:extLst xmlns:a="http://schemas.openxmlformats.org/drawingml/2006/main">
               <a:ext uri="{FF2B5EF4-FFF2-40B4-BE49-F238E27FC236}">
-                <a16:creationId xmlns:a16="http://schemas.microsoft.com/office/drawing/2014/main" id="{A4FCAF69-9C03-415F-91FE-01FCC280E32A}"/>
+                <a16:creationId xmlns:a16="http://schemas.microsoft.com/office/drawing/2014/main" id="{A9CB42B6-8204-4C68-B7AB-A888D9CC75EF}"/>
               </a:ext>
             </a:extLst>
           </p:cNvPr>
@@ -2459,7 +2459,7 @@
           <p:cNvPr id="2" name="">
             <a:extLst xmlns:a="http://schemas.openxmlformats.org/drawingml/2006/main">
               <a:ext uri="{FF2B5EF4-FFF2-40B4-BE49-F238E27FC236}">
-                <a16:creationId xmlns:a16="http://schemas.microsoft.com/office/drawing/2014/main" id="{1ADD09BE-5037-4816-B75A-C31FB18F1266}"/>
+                <a16:creationId xmlns:a16="http://schemas.microsoft.com/office/drawing/2014/main" id="{8A9B3A12-D5AA-4BA0-9C83-18186104E970}"/>
               </a:ext>
             </a:extLst>
           </p:cNvPr>
@@ -2516,7 +2516,7 @@
           <p:cNvPr id="3" name="">
             <a:extLst xmlns:a="http://schemas.openxmlformats.org/drawingml/2006/main">
               <a:ext uri="{FF2B5EF4-FFF2-40B4-BE49-F238E27FC236}">
-                <a16:creationId xmlns:a16="http://schemas.microsoft.com/office/drawing/2014/main" id="{82ED81BB-6AC3-4C0E-BE79-EF274250CF88}"/>
+                <a16:creationId xmlns:a16="http://schemas.microsoft.com/office/drawing/2014/main" id="{122E8465-151A-483E-BEF1-C0C04ED55A88}"/>
               </a:ext>
             </a:extLst>
           </p:cNvPr>
@@ -2548,7 +2548,7 @@
           <p:cNvPr id="4" name="">
             <a:extLst xmlns:a="http://schemas.openxmlformats.org/drawingml/2006/main">
               <a:ext uri="{FF2B5EF4-FFF2-40B4-BE49-F238E27FC236}">
-                <a16:creationId xmlns:a16="http://schemas.microsoft.com/office/drawing/2014/main" id="{144C22F5-22D7-4551-B1A9-275CCC86469A}"/>
+                <a16:creationId xmlns:a16="http://schemas.microsoft.com/office/drawing/2014/main" id="{6C72B9B1-BDC4-4753-B87F-724C2581CD35}"/>
               </a:ext>
             </a:extLst>
           </p:cNvPr>
@@ -2605,7 +2605,7 @@
           <p:cNvPr id="5" name="">
             <a:extLst xmlns:a="http://schemas.openxmlformats.org/drawingml/2006/main">
               <a:ext uri="{FF2B5EF4-FFF2-40B4-BE49-F238E27FC236}">
-                <a16:creationId xmlns:a16="http://schemas.microsoft.com/office/drawing/2014/main" id="{FEA28352-2134-4830-B8BA-D3F644AF58DC}"/>
+                <a16:creationId xmlns:a16="http://schemas.microsoft.com/office/drawing/2014/main" id="{CC67982E-867F-499D-984B-59BEFC9FBCF6}"/>
               </a:ext>
             </a:extLst>
           </p:cNvPr>
@@ -2662,7 +2662,7 @@
           <p:cNvPr id="6" name="">
             <a:extLst xmlns:a="http://schemas.openxmlformats.org/drawingml/2006/main">
               <a:ext uri="{FF2B5EF4-FFF2-40B4-BE49-F238E27FC236}">
-                <a16:creationId xmlns:a16="http://schemas.microsoft.com/office/drawing/2014/main" id="{71F9C90C-6421-4C3F-934A-65B6341DA82A}"/>
+                <a16:creationId xmlns:a16="http://schemas.microsoft.com/office/drawing/2014/main" id="{31FA0D62-E417-4E33-8B1C-3DCD263BE3C2}"/>
               </a:ext>
             </a:extLst>
           </p:cNvPr>
@@ -2719,7 +2719,7 @@
           <p:cNvPr id="7" name="">
             <a:extLst xmlns:a="http://schemas.openxmlformats.org/drawingml/2006/main">
               <a:ext uri="{FF2B5EF4-FFF2-40B4-BE49-F238E27FC236}">
-                <a16:creationId xmlns:a16="http://schemas.microsoft.com/office/drawing/2014/main" id="{4BBE0A73-3659-4E30-BBE3-BA0D7835CBB7}"/>
+                <a16:creationId xmlns:a16="http://schemas.microsoft.com/office/drawing/2014/main" id="{91C41257-C0D0-4192-BD14-2B36EEFBBA26}"/>
               </a:ext>
             </a:extLst>
           </p:cNvPr>
@@ -2751,7 +2751,7 @@
           <p:cNvPr id="8" name="">
             <a:extLst xmlns:a="http://schemas.openxmlformats.org/drawingml/2006/main">
               <a:ext uri="{FF2B5EF4-FFF2-40B4-BE49-F238E27FC236}">
-                <a16:creationId xmlns:a16="http://schemas.microsoft.com/office/drawing/2014/main" id="{F6B00731-5216-48F4-8049-DB4BFA870482}"/>
+                <a16:creationId xmlns:a16="http://schemas.microsoft.com/office/drawing/2014/main" id="{44B148C7-EFBF-4AEC-BE78-468080747372}"/>
               </a:ext>
             </a:extLst>
           </p:cNvPr>
@@ -2808,7 +2808,7 @@
           <p:cNvPr id="9" name="">
             <a:extLst xmlns:a="http://schemas.openxmlformats.org/drawingml/2006/main">
               <a:ext uri="{FF2B5EF4-FFF2-40B4-BE49-F238E27FC236}">
-                <a16:creationId xmlns:a16="http://schemas.microsoft.com/office/drawing/2014/main" id="{AD826552-872F-46B6-9810-CBFB1B60B64A}"/>
+                <a16:creationId xmlns:a16="http://schemas.microsoft.com/office/drawing/2014/main" id="{2A30747A-CD3C-45CF-B12D-5A25663114BE}"/>
               </a:ext>
             </a:extLst>
           </p:cNvPr>
@@ -2865,7 +2865,7 @@
           <p:cNvPr id="10" name="">
             <a:extLst xmlns:a="http://schemas.openxmlformats.org/drawingml/2006/main">
               <a:ext uri="{FF2B5EF4-FFF2-40B4-BE49-F238E27FC236}">
-                <a16:creationId xmlns:a16="http://schemas.microsoft.com/office/drawing/2014/main" id="{7ED17335-C554-49CE-9C3F-D9BED56F0557}"/>
+                <a16:creationId xmlns:a16="http://schemas.microsoft.com/office/drawing/2014/main" id="{3CB74405-B8E7-41D2-92B1-CB39F41121DB}"/>
               </a:ext>
             </a:extLst>
           </p:cNvPr>
@@ -2922,7 +2922,7 @@
           <p:cNvPr id="11" name="">
             <a:extLst xmlns:a="http://schemas.openxmlformats.org/drawingml/2006/main">
               <a:ext uri="{FF2B5EF4-FFF2-40B4-BE49-F238E27FC236}">
-                <a16:creationId xmlns:a16="http://schemas.microsoft.com/office/drawing/2014/main" id="{EB10F077-08F3-4E9C-B3C0-82239B56E4FD}"/>
+                <a16:creationId xmlns:a16="http://schemas.microsoft.com/office/drawing/2014/main" id="{D27D8D6A-F3E7-4018-8BF3-4CF14EBDE58C}"/>
               </a:ext>
             </a:extLst>
           </p:cNvPr>
@@ -2979,7 +2979,7 @@
           <p:cNvPr id="12" name="">
             <a:extLst xmlns:a="http://schemas.openxmlformats.org/drawingml/2006/main">
               <a:ext uri="{FF2B5EF4-FFF2-40B4-BE49-F238E27FC236}">
-                <a16:creationId xmlns:a16="http://schemas.microsoft.com/office/drawing/2014/main" id="{27DC921E-B5CB-4818-9AEE-3D363502BE1C}"/>
+                <a16:creationId xmlns:a16="http://schemas.microsoft.com/office/drawing/2014/main" id="{CCB62764-407C-40C9-A324-5849DA6B5EB8}"/>
               </a:ext>
             </a:extLst>
           </p:cNvPr>
@@ -3036,7 +3036,7 @@
           <p:cNvPr id="13" name="">
             <a:extLst xmlns:a="http://schemas.openxmlformats.org/drawingml/2006/main">
               <a:ext uri="{FF2B5EF4-FFF2-40B4-BE49-F238E27FC236}">
-                <a16:creationId xmlns:a16="http://schemas.microsoft.com/office/drawing/2014/main" id="{2B310979-3936-419D-9247-2131FCD7C802}"/>
+                <a16:creationId xmlns:a16="http://schemas.microsoft.com/office/drawing/2014/main" id="{D3271E99-AD8A-41B9-B73F-FCAD7538BE60}"/>
               </a:ext>
             </a:extLst>
           </p:cNvPr>
@@ -3091,7 +3091,7 @@
     </p:spTree>
     <p:extLst>
       <p:ext uri="{BB962C8B-B14F-4D97-AF65-F5344CB8AC3E}">
-        <p14:creationId xmlns:p14="http://schemas.microsoft.com/office/powerpoint/2010/main" val="1225478657"/>
+        <p14:creationId xmlns:p14="http://schemas.microsoft.com/office/powerpoint/2010/main" val="183830369"/>
       </p:ext>
     </p:extLst>
   </p:cSld>
@@ -3292,7 +3292,7 @@
           <p:cNvPr id="19" name="">
             <a:extLst xmlns:a="http://schemas.openxmlformats.org/drawingml/2006/main">
               <a:ext uri="{FF2B5EF4-FFF2-40B4-BE49-F238E27FC236}">
-                <a16:creationId xmlns:a16="http://schemas.microsoft.com/office/drawing/2014/main" id="{1EEE0D94-15C9-4D31-8CB4-DC7624D7D46A}"/>
+                <a16:creationId xmlns:a16="http://schemas.microsoft.com/office/drawing/2014/main" id="{CE13240C-4702-4EBF-8D9C-0235A53E0655}"/>
               </a:ext>
             </a:extLst>
           </p:cNvPr>
@@ -3324,7 +3324,7 @@
           <p:cNvPr id="2" name="">
             <a:extLst xmlns:a="http://schemas.openxmlformats.org/drawingml/2006/main">
               <a:ext uri="{FF2B5EF4-FFF2-40B4-BE49-F238E27FC236}">
-                <a16:creationId xmlns:a16="http://schemas.microsoft.com/office/drawing/2014/main" id="{0D74AF9C-7BA4-4A72-944D-067D9CC3B48E}"/>
+                <a16:creationId xmlns:a16="http://schemas.microsoft.com/office/drawing/2014/main" id="{3FCC03BF-F82F-458C-A057-FEF4B6504BE2}"/>
               </a:ext>
             </a:extLst>
           </p:cNvPr>
@@ -3381,7 +3381,7 @@
           <p:cNvPr id="3" name="">
             <a:extLst xmlns:a="http://schemas.openxmlformats.org/drawingml/2006/main">
               <a:ext uri="{FF2B5EF4-FFF2-40B4-BE49-F238E27FC236}">
-                <a16:creationId xmlns:a16="http://schemas.microsoft.com/office/drawing/2014/main" id="{BF1799B3-B471-43FB-AFFC-3B846988C54E}"/>
+                <a16:creationId xmlns:a16="http://schemas.microsoft.com/office/drawing/2014/main" id="{CD772A00-367F-409F-915B-4345CD12F150}"/>
               </a:ext>
             </a:extLst>
           </p:cNvPr>
@@ -3413,7 +3413,7 @@
           <p:cNvPr id="4" name="">
             <a:extLst xmlns:a="http://schemas.openxmlformats.org/drawingml/2006/main">
               <a:ext uri="{FF2B5EF4-FFF2-40B4-BE49-F238E27FC236}">
-                <a16:creationId xmlns:a16="http://schemas.microsoft.com/office/drawing/2014/main" id="{76B6FF89-A2BC-47F9-AD3F-36C1F8F7FEF0}"/>
+                <a16:creationId xmlns:a16="http://schemas.microsoft.com/office/drawing/2014/main" id="{5A8A9B18-5B5B-40DC-8608-717FD492C3C9}"/>
               </a:ext>
             </a:extLst>
           </p:cNvPr>
@@ -3470,7 +3470,7 @@
           <p:cNvPr id="5" name="">
             <a:extLst xmlns:a="http://schemas.openxmlformats.org/drawingml/2006/main">
               <a:ext uri="{FF2B5EF4-FFF2-40B4-BE49-F238E27FC236}">
-                <a16:creationId xmlns:a16="http://schemas.microsoft.com/office/drawing/2014/main" id="{62D0730D-0231-40AC-A05B-C6205C79252A}"/>
+                <a16:creationId xmlns:a16="http://schemas.microsoft.com/office/drawing/2014/main" id="{503BFA01-A9D0-4C4B-9EE9-D80DDCA34DB8}"/>
               </a:ext>
             </a:extLst>
           </p:cNvPr>
@@ -3527,7 +3527,7 @@
           <p:cNvPr id="6" name="">
             <a:extLst xmlns:a="http://schemas.openxmlformats.org/drawingml/2006/main">
               <a:ext uri="{FF2B5EF4-FFF2-40B4-BE49-F238E27FC236}">
-                <a16:creationId xmlns:a16="http://schemas.microsoft.com/office/drawing/2014/main" id="{EAE9D976-39F4-4B04-A555-2A442FAEF7B8}"/>
+                <a16:creationId xmlns:a16="http://schemas.microsoft.com/office/drawing/2014/main" id="{68BAD4F8-9362-42A3-8A06-0DEEF338F90E}"/>
               </a:ext>
             </a:extLst>
           </p:cNvPr>
@@ -3584,7 +3584,7 @@
           <p:cNvPr id="7" name="">
             <a:extLst xmlns:a="http://schemas.openxmlformats.org/drawingml/2006/main">
               <a:ext uri="{FF2B5EF4-FFF2-40B4-BE49-F238E27FC236}">
-                <a16:creationId xmlns:a16="http://schemas.microsoft.com/office/drawing/2014/main" id="{705F9C18-E409-4174-8ED4-46170D3E597F}"/>
+                <a16:creationId xmlns:a16="http://schemas.microsoft.com/office/drawing/2014/main" id="{B327A066-E3BF-4923-BA58-4BF3845DF328}"/>
               </a:ext>
             </a:extLst>
           </p:cNvPr>
@@ -3616,7 +3616,7 @@
           <p:cNvPr id="8" name="">
             <a:extLst xmlns:a="http://schemas.openxmlformats.org/drawingml/2006/main">
               <a:ext uri="{FF2B5EF4-FFF2-40B4-BE49-F238E27FC236}">
-                <a16:creationId xmlns:a16="http://schemas.microsoft.com/office/drawing/2014/main" id="{E403E93B-D049-44D0-8523-DC22C2A0F1FA}"/>
+                <a16:creationId xmlns:a16="http://schemas.microsoft.com/office/drawing/2014/main" id="{63F4A2E6-2BF5-4393-9FDD-937E4646432C}"/>
               </a:ext>
             </a:extLst>
           </p:cNvPr>
@@ -3673,7 +3673,7 @@
           <p:cNvPr id="9" name="">
             <a:extLst xmlns:a="http://schemas.openxmlformats.org/drawingml/2006/main">
               <a:ext uri="{FF2B5EF4-FFF2-40B4-BE49-F238E27FC236}">
-                <a16:creationId xmlns:a16="http://schemas.microsoft.com/office/drawing/2014/main" id="{CD8E191E-171D-43A7-A77D-278FFA60D1C1}"/>
+                <a16:creationId xmlns:a16="http://schemas.microsoft.com/office/drawing/2014/main" id="{63D7F765-E87D-43AD-85D0-85B47438768D}"/>
               </a:ext>
             </a:extLst>
           </p:cNvPr>
@@ -3730,7 +3730,7 @@
           <p:cNvPr id="10" name="">
             <a:extLst xmlns:a="http://schemas.openxmlformats.org/drawingml/2006/main">
               <a:ext uri="{FF2B5EF4-FFF2-40B4-BE49-F238E27FC236}">
-                <a16:creationId xmlns:a16="http://schemas.microsoft.com/office/drawing/2014/main" id="{20B0A543-297A-4039-934D-BC2849F6732D}"/>
+                <a16:creationId xmlns:a16="http://schemas.microsoft.com/office/drawing/2014/main" id="{05FBB213-3EA3-487C-B50A-E941AB832402}"/>
               </a:ext>
             </a:extLst>
           </p:cNvPr>
@@ -3787,7 +3787,7 @@
           <p:cNvPr id="11" name="">
             <a:extLst xmlns:a="http://schemas.openxmlformats.org/drawingml/2006/main">
               <a:ext uri="{FF2B5EF4-FFF2-40B4-BE49-F238E27FC236}">
-                <a16:creationId xmlns:a16="http://schemas.microsoft.com/office/drawing/2014/main" id="{78C69C16-8221-4D7A-BB7F-FD7ABCB75942}"/>
+                <a16:creationId xmlns:a16="http://schemas.microsoft.com/office/drawing/2014/main" id="{D4E01DE4-8BEF-42D8-A051-48FB4512E5A7}"/>
               </a:ext>
             </a:extLst>
           </p:cNvPr>
@@ -3821,7 +3821,7 @@
           <p:cNvPr id="12" name="">
             <a:extLst xmlns:a="http://schemas.openxmlformats.org/drawingml/2006/main">
               <a:ext uri="{FF2B5EF4-FFF2-40B4-BE49-F238E27FC236}">
-                <a16:creationId xmlns:a16="http://schemas.microsoft.com/office/drawing/2014/main" id="{F5F42863-9FB2-41BC-94CF-821C059F6FCE}"/>
+                <a16:creationId xmlns:a16="http://schemas.microsoft.com/office/drawing/2014/main" id="{2D7E4372-8BE4-4F65-84C4-9DA5C5428DBF}"/>
               </a:ext>
             </a:extLst>
           </p:cNvPr>
@@ -3878,7 +3878,7 @@
           <p:cNvPr id="13" name="">
             <a:extLst xmlns:a="http://schemas.openxmlformats.org/drawingml/2006/main">
               <a:ext uri="{FF2B5EF4-FFF2-40B4-BE49-F238E27FC236}">
-                <a16:creationId xmlns:a16="http://schemas.microsoft.com/office/drawing/2014/main" id="{35EE0C8B-1032-4F19-916A-81F0ED8D2A9C}"/>
+                <a16:creationId xmlns:a16="http://schemas.microsoft.com/office/drawing/2014/main" id="{ECCBD844-00D2-46A3-ACB0-878CD0BF1520}"/>
               </a:ext>
             </a:extLst>
           </p:cNvPr>
@@ -3935,7 +3935,7 @@
           <p:cNvPr id="14" name="">
             <a:extLst xmlns:a="http://schemas.openxmlformats.org/drawingml/2006/main">
               <a:ext uri="{FF2B5EF4-FFF2-40B4-BE49-F238E27FC236}">
-                <a16:creationId xmlns:a16="http://schemas.microsoft.com/office/drawing/2014/main" id="{6B27B2DC-EAE6-487C-AEDC-B739230A81BB}"/>
+                <a16:creationId xmlns:a16="http://schemas.microsoft.com/office/drawing/2014/main" id="{CFBEB20B-E5D8-4279-9A39-48EB1AE0EEC4}"/>
               </a:ext>
             </a:extLst>
           </p:cNvPr>
@@ -3992,7 +3992,7 @@
           <p:cNvPr id="15" name="">
             <a:extLst xmlns:a="http://schemas.openxmlformats.org/drawingml/2006/main">
               <a:ext uri="{FF2B5EF4-FFF2-40B4-BE49-F238E27FC236}">
-                <a16:creationId xmlns:a16="http://schemas.microsoft.com/office/drawing/2014/main" id="{CC58A7BD-5E3A-48EC-B0EB-4906F01A293E}"/>
+                <a16:creationId xmlns:a16="http://schemas.microsoft.com/office/drawing/2014/main" id="{EA891F4A-C1DB-41BB-B060-1AF489123A7B}"/>
               </a:ext>
             </a:extLst>
           </p:cNvPr>
@@ -4026,7 +4026,7 @@
           <p:cNvPr id="16" name="">
             <a:extLst xmlns:a="http://schemas.openxmlformats.org/drawingml/2006/main">
               <a:ext uri="{FF2B5EF4-FFF2-40B4-BE49-F238E27FC236}">
-                <a16:creationId xmlns:a16="http://schemas.microsoft.com/office/drawing/2014/main" id="{9421EB4D-5A0C-4A85-B7D8-DA259C1F1518}"/>
+                <a16:creationId xmlns:a16="http://schemas.microsoft.com/office/drawing/2014/main" id="{8AC2D9E6-21DF-484D-A3BF-5175D41DE2BE}"/>
               </a:ext>
             </a:extLst>
           </p:cNvPr>
@@ -4083,7 +4083,7 @@
           <p:cNvPr id="17" name="">
             <a:extLst xmlns:a="http://schemas.openxmlformats.org/drawingml/2006/main">
               <a:ext uri="{FF2B5EF4-FFF2-40B4-BE49-F238E27FC236}">
-                <a16:creationId xmlns:a16="http://schemas.microsoft.com/office/drawing/2014/main" id="{80ECC307-F744-411C-BE38-28CB65D1006B}"/>
+                <a16:creationId xmlns:a16="http://schemas.microsoft.com/office/drawing/2014/main" id="{E83B3EE3-C7C7-4243-B438-CDE1C7700A01}"/>
               </a:ext>
             </a:extLst>
           </p:cNvPr>
@@ -4140,7 +4140,7 @@
           <p:cNvPr id="18" name="">
             <a:extLst xmlns:a="http://schemas.openxmlformats.org/drawingml/2006/main">
               <a:ext uri="{FF2B5EF4-FFF2-40B4-BE49-F238E27FC236}">
-                <a16:creationId xmlns:a16="http://schemas.microsoft.com/office/drawing/2014/main" id="{D94EDB30-B1DA-4821-A721-3D39CEB91E05}"/>
+                <a16:creationId xmlns:a16="http://schemas.microsoft.com/office/drawing/2014/main" id="{6F0E9AE7-763C-4D05-A5F8-35BE1405C21D}"/>
               </a:ext>
             </a:extLst>
           </p:cNvPr>
@@ -4195,7 +4195,7 @@
     </p:spTree>
     <p:extLst>
       <p:ext uri="{BB962C8B-B14F-4D97-AF65-F5344CB8AC3E}">
-        <p14:creationId xmlns:p14="http://schemas.microsoft.com/office/powerpoint/2010/main" val="927498916"/>
+        <p14:creationId xmlns:p14="http://schemas.microsoft.com/office/powerpoint/2010/main" val="1434850135"/>
       </p:ext>
     </p:extLst>
   </p:cSld>
@@ -4350,7 +4350,7 @@
           <p:cNvPr id="23" name="">
             <a:extLst xmlns:a="http://schemas.openxmlformats.org/drawingml/2006/main">
               <a:ext uri="{FF2B5EF4-FFF2-40B4-BE49-F238E27FC236}">
-                <a16:creationId xmlns:a16="http://schemas.microsoft.com/office/drawing/2014/main" id="{00F3EFF7-A74B-43C3-A615-656EC37864AD}"/>
+                <a16:creationId xmlns:a16="http://schemas.microsoft.com/office/drawing/2014/main" id="{38FC0AAD-51E6-4003-9900-2A2FBEFA09D7}"/>
               </a:ext>
             </a:extLst>
           </p:cNvPr>
@@ -4382,7 +4382,7 @@
           <p:cNvPr id="2" name="">
             <a:extLst xmlns:a="http://schemas.openxmlformats.org/drawingml/2006/main">
               <a:ext uri="{FF2B5EF4-FFF2-40B4-BE49-F238E27FC236}">
-                <a16:creationId xmlns:a16="http://schemas.microsoft.com/office/drawing/2014/main" id="{4839F635-DEEF-4A7E-A676-6C00AAFF0A1F}"/>
+                <a16:creationId xmlns:a16="http://schemas.microsoft.com/office/drawing/2014/main" id="{589F7AB3-4C17-47A2-A517-5E4A4764CD48}"/>
               </a:ext>
             </a:extLst>
           </p:cNvPr>
@@ -4439,7 +4439,7 @@
           <p:cNvPr id="3" name="">
             <a:extLst xmlns:a="http://schemas.openxmlformats.org/drawingml/2006/main">
               <a:ext uri="{FF2B5EF4-FFF2-40B4-BE49-F238E27FC236}">
-                <a16:creationId xmlns:a16="http://schemas.microsoft.com/office/drawing/2014/main" id="{E7E3248C-E11A-45F1-A745-8807F1B27777}"/>
+                <a16:creationId xmlns:a16="http://schemas.microsoft.com/office/drawing/2014/main" id="{E2395CE2-8B6A-4431-B308-B268EAE46764}"/>
               </a:ext>
             </a:extLst>
           </p:cNvPr>
@@ -4471,7 +4471,7 @@
           <p:cNvPr id="4" name="">
             <a:extLst xmlns:a="http://schemas.openxmlformats.org/drawingml/2006/main">
               <a:ext uri="{FF2B5EF4-FFF2-40B4-BE49-F238E27FC236}">
-                <a16:creationId xmlns:a16="http://schemas.microsoft.com/office/drawing/2014/main" id="{0873CD4B-7151-44D2-94C4-70D90BBC0932}"/>
+                <a16:creationId xmlns:a16="http://schemas.microsoft.com/office/drawing/2014/main" id="{48D2D27F-A558-4CD0-AFC8-9D7ABE663B64}"/>
               </a:ext>
             </a:extLst>
           </p:cNvPr>
@@ -4528,7 +4528,7 @@
           <p:cNvPr id="5" name="">
             <a:extLst xmlns:a="http://schemas.openxmlformats.org/drawingml/2006/main">
               <a:ext uri="{FF2B5EF4-FFF2-40B4-BE49-F238E27FC236}">
-                <a16:creationId xmlns:a16="http://schemas.microsoft.com/office/drawing/2014/main" id="{DBAD3408-DC35-4B51-B01E-D2011C3D6675}"/>
+                <a16:creationId xmlns:a16="http://schemas.microsoft.com/office/drawing/2014/main" id="{0C813E56-8704-4270-AD68-290487F0CBF2}"/>
               </a:ext>
             </a:extLst>
           </p:cNvPr>
@@ -4585,7 +4585,7 @@
           <p:cNvPr id="6" name="">
             <a:extLst xmlns:a="http://schemas.openxmlformats.org/drawingml/2006/main">
               <a:ext uri="{FF2B5EF4-FFF2-40B4-BE49-F238E27FC236}">
-                <a16:creationId xmlns:a16="http://schemas.microsoft.com/office/drawing/2014/main" id="{237F453D-77DD-43AB-BCC4-8F0EE914475D}"/>
+                <a16:creationId xmlns:a16="http://schemas.microsoft.com/office/drawing/2014/main" id="{589A8018-D570-4963-A253-B98E9004F430}"/>
               </a:ext>
             </a:extLst>
           </p:cNvPr>
@@ -4642,7 +4642,7 @@
           <p:cNvPr id="7" name="">
             <a:extLst xmlns:a="http://schemas.openxmlformats.org/drawingml/2006/main">
               <a:ext uri="{FF2B5EF4-FFF2-40B4-BE49-F238E27FC236}">
-                <a16:creationId xmlns:a16="http://schemas.microsoft.com/office/drawing/2014/main" id="{87FECF11-EC21-4197-8AD5-3429E5B266B8}"/>
+                <a16:creationId xmlns:a16="http://schemas.microsoft.com/office/drawing/2014/main" id="{CB7F55FA-01A9-431C-9A21-4E28A072B143}"/>
               </a:ext>
             </a:extLst>
           </p:cNvPr>
@@ -4674,7 +4674,7 @@
           <p:cNvPr id="8" name="">
             <a:extLst xmlns:a="http://schemas.openxmlformats.org/drawingml/2006/main">
               <a:ext uri="{FF2B5EF4-FFF2-40B4-BE49-F238E27FC236}">
-                <a16:creationId xmlns:a16="http://schemas.microsoft.com/office/drawing/2014/main" id="{B23E0403-84C2-4A7D-8A8F-F1F52AC366AA}"/>
+                <a16:creationId xmlns:a16="http://schemas.microsoft.com/office/drawing/2014/main" id="{72D1FFB1-DC92-43BC-B2F0-3C3CB3B8417D}"/>
               </a:ext>
             </a:extLst>
           </p:cNvPr>
@@ -4731,7 +4731,7 @@
           <p:cNvPr id="9" name="">
             <a:extLst xmlns:a="http://schemas.openxmlformats.org/drawingml/2006/main">
               <a:ext uri="{FF2B5EF4-FFF2-40B4-BE49-F238E27FC236}">
-                <a16:creationId xmlns:a16="http://schemas.microsoft.com/office/drawing/2014/main" id="{F6BCD3CA-0C74-44D0-ABE7-6FEEAC02AABC}"/>
+                <a16:creationId xmlns:a16="http://schemas.microsoft.com/office/drawing/2014/main" id="{2FB086BA-5620-4DE6-8190-70B022FB4840}"/>
               </a:ext>
             </a:extLst>
           </p:cNvPr>
@@ -4788,7 +4788,7 @@
           <p:cNvPr id="10" name="">
             <a:extLst xmlns:a="http://schemas.openxmlformats.org/drawingml/2006/main">
               <a:ext uri="{FF2B5EF4-FFF2-40B4-BE49-F238E27FC236}">
-                <a16:creationId xmlns:a16="http://schemas.microsoft.com/office/drawing/2014/main" id="{E7C9CB9F-89A9-4897-B302-3457BF3F6E33}"/>
+                <a16:creationId xmlns:a16="http://schemas.microsoft.com/office/drawing/2014/main" id="{E29BF395-C681-4E4F-B5AE-E00E98B9DB4E}"/>
               </a:ext>
             </a:extLst>
           </p:cNvPr>
@@ -4822,7 +4822,7 @@
           <p:cNvPr id="11" name="">
             <a:extLst xmlns:a="http://schemas.openxmlformats.org/drawingml/2006/main">
               <a:ext uri="{FF2B5EF4-FFF2-40B4-BE49-F238E27FC236}">
-                <a16:creationId xmlns:a16="http://schemas.microsoft.com/office/drawing/2014/main" id="{E8101903-7873-49D3-AA91-4ABF82FA98D2}"/>
+                <a16:creationId xmlns:a16="http://schemas.microsoft.com/office/drawing/2014/main" id="{5996B643-2A83-4DC6-9AFA-3430754AA5A2}"/>
               </a:ext>
             </a:extLst>
           </p:cNvPr>
@@ -4854,7 +4854,7 @@
           <p:cNvPr id="12" name="">
             <a:extLst xmlns:a="http://schemas.openxmlformats.org/drawingml/2006/main">
               <a:ext uri="{FF2B5EF4-FFF2-40B4-BE49-F238E27FC236}">
-                <a16:creationId xmlns:a16="http://schemas.microsoft.com/office/drawing/2014/main" id="{B94AB77E-9503-4D75-976B-380EAC5B12D0}"/>
+                <a16:creationId xmlns:a16="http://schemas.microsoft.com/office/drawing/2014/main" id="{C23EF173-DE76-447D-84B6-8E2AE0FFC097}"/>
               </a:ext>
             </a:extLst>
           </p:cNvPr>
@@ -4911,7 +4911,7 @@
           <p:cNvPr id="13" name="">
             <a:extLst xmlns:a="http://schemas.openxmlformats.org/drawingml/2006/main">
               <a:ext uri="{FF2B5EF4-FFF2-40B4-BE49-F238E27FC236}">
-                <a16:creationId xmlns:a16="http://schemas.microsoft.com/office/drawing/2014/main" id="{CFABD700-8976-4D81-8570-1270DEB0B1DE}"/>
+                <a16:creationId xmlns:a16="http://schemas.microsoft.com/office/drawing/2014/main" id="{99BD9423-A646-44A3-A403-1200A52132BD}"/>
               </a:ext>
             </a:extLst>
           </p:cNvPr>
@@ -4968,7 +4968,7 @@
           <p:cNvPr id="14" name="">
             <a:extLst xmlns:a="http://schemas.openxmlformats.org/drawingml/2006/main">
               <a:ext uri="{FF2B5EF4-FFF2-40B4-BE49-F238E27FC236}">
-                <a16:creationId xmlns:a16="http://schemas.microsoft.com/office/drawing/2014/main" id="{8314DD86-2CF6-48B0-B75F-3EA7EB89A904}"/>
+                <a16:creationId xmlns:a16="http://schemas.microsoft.com/office/drawing/2014/main" id="{DFFE7339-B710-4745-AD37-179409685858}"/>
               </a:ext>
             </a:extLst>
           </p:cNvPr>
@@ -5002,7 +5002,7 @@
           <p:cNvPr id="15" name="">
             <a:extLst xmlns:a="http://schemas.openxmlformats.org/drawingml/2006/main">
               <a:ext uri="{FF2B5EF4-FFF2-40B4-BE49-F238E27FC236}">
-                <a16:creationId xmlns:a16="http://schemas.microsoft.com/office/drawing/2014/main" id="{28932602-CE76-4A09-AABB-2F8258E3CC55}"/>
+                <a16:creationId xmlns:a16="http://schemas.microsoft.com/office/drawing/2014/main" id="{BD306A7B-21EF-404C-8669-EAE3543F27BE}"/>
               </a:ext>
             </a:extLst>
           </p:cNvPr>
@@ -5034,7 +5034,7 @@
           <p:cNvPr id="16" name="">
             <a:extLst xmlns:a="http://schemas.openxmlformats.org/drawingml/2006/main">
               <a:ext uri="{FF2B5EF4-FFF2-40B4-BE49-F238E27FC236}">
-                <a16:creationId xmlns:a16="http://schemas.microsoft.com/office/drawing/2014/main" id="{04F25592-A5F8-43A9-BE62-5F9F1C3BDF53}"/>
+                <a16:creationId xmlns:a16="http://schemas.microsoft.com/office/drawing/2014/main" id="{9C16016F-E3BC-4BE0-9DA1-BE5C30025303}"/>
               </a:ext>
             </a:extLst>
           </p:cNvPr>
@@ -5091,7 +5091,7 @@
           <p:cNvPr id="17" name="">
             <a:extLst xmlns:a="http://schemas.openxmlformats.org/drawingml/2006/main">
               <a:ext uri="{FF2B5EF4-FFF2-40B4-BE49-F238E27FC236}">
-                <a16:creationId xmlns:a16="http://schemas.microsoft.com/office/drawing/2014/main" id="{DDE3BAC7-1720-4C35-B626-C673CCD8577A}"/>
+                <a16:creationId xmlns:a16="http://schemas.microsoft.com/office/drawing/2014/main" id="{D61EF8A4-A451-485C-BAE2-C3D0B08F8CF9}"/>
               </a:ext>
             </a:extLst>
           </p:cNvPr>
@@ -5148,7 +5148,7 @@
           <p:cNvPr id="18" name="">
             <a:extLst xmlns:a="http://schemas.openxmlformats.org/drawingml/2006/main">
               <a:ext uri="{FF2B5EF4-FFF2-40B4-BE49-F238E27FC236}">
-                <a16:creationId xmlns:a16="http://schemas.microsoft.com/office/drawing/2014/main" id="{556079CD-51B0-43F2-B9EE-FDBD8B943FFC}"/>
+                <a16:creationId xmlns:a16="http://schemas.microsoft.com/office/drawing/2014/main" id="{9F940945-7126-4DBA-A7C5-2F3214C10334}"/>
               </a:ext>
             </a:extLst>
           </p:cNvPr>
@@ -5182,7 +5182,7 @@
           <p:cNvPr id="19" name="">
             <a:extLst xmlns:a="http://schemas.openxmlformats.org/drawingml/2006/main">
               <a:ext uri="{FF2B5EF4-FFF2-40B4-BE49-F238E27FC236}">
-                <a16:creationId xmlns:a16="http://schemas.microsoft.com/office/drawing/2014/main" id="{EFDEF0B4-499E-4133-9914-9A7BCDC05326}"/>
+                <a16:creationId xmlns:a16="http://schemas.microsoft.com/office/drawing/2014/main" id="{D99194A3-A0E2-4EEA-A0EA-2373B77968E9}"/>
               </a:ext>
             </a:extLst>
           </p:cNvPr>
@@ -5214,7 +5214,7 @@
           <p:cNvPr id="20" name="">
             <a:extLst xmlns:a="http://schemas.openxmlformats.org/drawingml/2006/main">
               <a:ext uri="{FF2B5EF4-FFF2-40B4-BE49-F238E27FC236}">
-                <a16:creationId xmlns:a16="http://schemas.microsoft.com/office/drawing/2014/main" id="{2C30EC34-C95C-4A05-B54A-2C711419C57A}"/>
+                <a16:creationId xmlns:a16="http://schemas.microsoft.com/office/drawing/2014/main" id="{5BAE7F62-1A63-4B4F-9843-4D8E5DE72E85}"/>
               </a:ext>
             </a:extLst>
           </p:cNvPr>
@@ -5271,7 +5271,7 @@
           <p:cNvPr id="21" name="">
             <a:extLst xmlns:a="http://schemas.openxmlformats.org/drawingml/2006/main">
               <a:ext uri="{FF2B5EF4-FFF2-40B4-BE49-F238E27FC236}">
-                <a16:creationId xmlns:a16="http://schemas.microsoft.com/office/drawing/2014/main" id="{BBB4369F-0408-41C8-99F7-5F4ED4A15CBD}"/>
+                <a16:creationId xmlns:a16="http://schemas.microsoft.com/office/drawing/2014/main" id="{D5D95348-CBCD-4D9D-9A55-739DBAEF2785}"/>
               </a:ext>
             </a:extLst>
           </p:cNvPr>
@@ -5328,7 +5328,7 @@
           <p:cNvPr id="22" name="">
             <a:extLst xmlns:a="http://schemas.openxmlformats.org/drawingml/2006/main">
               <a:ext uri="{FF2B5EF4-FFF2-40B4-BE49-F238E27FC236}">
-                <a16:creationId xmlns:a16="http://schemas.microsoft.com/office/drawing/2014/main" id="{6AD77D3C-4217-4388-B34F-A2B9ABD50F56}"/>
+                <a16:creationId xmlns:a16="http://schemas.microsoft.com/office/drawing/2014/main" id="{AB7C51CC-D5B6-4BAB-B72C-02727B5C49EF}"/>
               </a:ext>
             </a:extLst>
           </p:cNvPr>
@@ -5383,7 +5383,7 @@
     </p:spTree>
     <p:extLst>
       <p:ext uri="{BB962C8B-B14F-4D97-AF65-F5344CB8AC3E}">
-        <p14:creationId xmlns:p14="http://schemas.microsoft.com/office/powerpoint/2010/main" val="1808764202"/>
+        <p14:creationId xmlns:p14="http://schemas.microsoft.com/office/powerpoint/2010/main" val="553509886"/>
       </p:ext>
     </p:extLst>
   </p:cSld>
@@ -5584,7 +5584,7 @@
           <p:cNvPr id="23" name="">
             <a:extLst xmlns:a="http://schemas.openxmlformats.org/drawingml/2006/main">
               <a:ext uri="{FF2B5EF4-FFF2-40B4-BE49-F238E27FC236}">
-                <a16:creationId xmlns:a16="http://schemas.microsoft.com/office/drawing/2014/main" id="{52F45418-6583-41A2-B14E-0DD506CA2B42}"/>
+                <a16:creationId xmlns:a16="http://schemas.microsoft.com/office/drawing/2014/main" id="{B0F62F62-8450-4277-ABB1-6088CBCFE2AB}"/>
               </a:ext>
             </a:extLst>
           </p:cNvPr>
@@ -5616,7 +5616,7 @@
           <p:cNvPr id="2" name="">
             <a:extLst xmlns:a="http://schemas.openxmlformats.org/drawingml/2006/main">
               <a:ext uri="{FF2B5EF4-FFF2-40B4-BE49-F238E27FC236}">
-                <a16:creationId xmlns:a16="http://schemas.microsoft.com/office/drawing/2014/main" id="{ADE3B17A-2DE3-459B-B0DE-13CD900AECDA}"/>
+                <a16:creationId xmlns:a16="http://schemas.microsoft.com/office/drawing/2014/main" id="{A82BC3A1-5E1A-468D-8912-9E2842A92997}"/>
               </a:ext>
             </a:extLst>
           </p:cNvPr>
@@ -5673,7 +5673,7 @@
           <p:cNvPr id="3" name="">
             <a:extLst xmlns:a="http://schemas.openxmlformats.org/drawingml/2006/main">
               <a:ext uri="{FF2B5EF4-FFF2-40B4-BE49-F238E27FC236}">
-                <a16:creationId xmlns:a16="http://schemas.microsoft.com/office/drawing/2014/main" id="{C2B3D003-6EBA-45D4-90BB-213F62AC186D}"/>
+                <a16:creationId xmlns:a16="http://schemas.microsoft.com/office/drawing/2014/main" id="{23051480-CEA9-4FEE-9793-171D19E4A888}"/>
               </a:ext>
             </a:extLst>
           </p:cNvPr>
@@ -5705,7 +5705,7 @@
           <p:cNvPr id="4" name="">
             <a:extLst xmlns:a="http://schemas.openxmlformats.org/drawingml/2006/main">
               <a:ext uri="{FF2B5EF4-FFF2-40B4-BE49-F238E27FC236}">
-                <a16:creationId xmlns:a16="http://schemas.microsoft.com/office/drawing/2014/main" id="{BEC355ED-D678-4AB9-B167-063569C39BF8}"/>
+                <a16:creationId xmlns:a16="http://schemas.microsoft.com/office/drawing/2014/main" id="{672B1EA8-942B-4A6D-9B62-0DF6A87F7952}"/>
               </a:ext>
             </a:extLst>
           </p:cNvPr>
@@ -5762,7 +5762,7 @@
           <p:cNvPr id="5" name="">
             <a:extLst xmlns:a="http://schemas.openxmlformats.org/drawingml/2006/main">
               <a:ext uri="{FF2B5EF4-FFF2-40B4-BE49-F238E27FC236}">
-                <a16:creationId xmlns:a16="http://schemas.microsoft.com/office/drawing/2014/main" id="{FCC1785B-D966-4D5A-86CE-004CEE0FEE66}"/>
+                <a16:creationId xmlns:a16="http://schemas.microsoft.com/office/drawing/2014/main" id="{1B02BDB6-C10B-4508-A3AC-0B2477CB5C20}"/>
               </a:ext>
             </a:extLst>
           </p:cNvPr>
@@ -5819,7 +5819,7 @@
           <p:cNvPr id="6" name="">
             <a:extLst xmlns:a="http://schemas.openxmlformats.org/drawingml/2006/main">
               <a:ext uri="{FF2B5EF4-FFF2-40B4-BE49-F238E27FC236}">
-                <a16:creationId xmlns:a16="http://schemas.microsoft.com/office/drawing/2014/main" id="{521C98C1-E686-4E26-BFCD-65E7F8B72DB2}"/>
+                <a16:creationId xmlns:a16="http://schemas.microsoft.com/office/drawing/2014/main" id="{C37F4F2C-0E8E-4B10-8C19-E7F2B76EABBF}"/>
               </a:ext>
             </a:extLst>
           </p:cNvPr>
@@ -5876,7 +5876,7 @@
           <p:cNvPr id="7" name="">
             <a:extLst xmlns:a="http://schemas.openxmlformats.org/drawingml/2006/main">
               <a:ext uri="{FF2B5EF4-FFF2-40B4-BE49-F238E27FC236}">
-                <a16:creationId xmlns:a16="http://schemas.microsoft.com/office/drawing/2014/main" id="{9AD517BF-327E-42D4-B51B-25075ADF58E5}"/>
+                <a16:creationId xmlns:a16="http://schemas.microsoft.com/office/drawing/2014/main" id="{162410A0-0BE3-4734-9BAB-0CAE29382087}"/>
               </a:ext>
             </a:extLst>
           </p:cNvPr>
@@ -5908,7 +5908,7 @@
           <p:cNvPr id="8" name="">
             <a:extLst xmlns:a="http://schemas.openxmlformats.org/drawingml/2006/main">
               <a:ext uri="{FF2B5EF4-FFF2-40B4-BE49-F238E27FC236}">
-                <a16:creationId xmlns:a16="http://schemas.microsoft.com/office/drawing/2014/main" id="{BA38AC4D-5C2B-4536-8034-4725C5F3E17E}"/>
+                <a16:creationId xmlns:a16="http://schemas.microsoft.com/office/drawing/2014/main" id="{0D03EDE0-C6E1-40D5-A91E-29A83A9A8DA9}"/>
               </a:ext>
             </a:extLst>
           </p:cNvPr>
@@ -5965,7 +5965,7 @@
           <p:cNvPr id="9" name="">
             <a:extLst xmlns:a="http://schemas.openxmlformats.org/drawingml/2006/main">
               <a:ext uri="{FF2B5EF4-FFF2-40B4-BE49-F238E27FC236}">
-                <a16:creationId xmlns:a16="http://schemas.microsoft.com/office/drawing/2014/main" id="{4DCD3502-87B1-403D-8C6E-24CF23918620}"/>
+                <a16:creationId xmlns:a16="http://schemas.microsoft.com/office/drawing/2014/main" id="{2D0EB8D1-C7BD-42FF-8C8F-A9F6519F6056}"/>
               </a:ext>
             </a:extLst>
           </p:cNvPr>
@@ -6022,7 +6022,7 @@
           <p:cNvPr id="10" name="">
             <a:extLst xmlns:a="http://schemas.openxmlformats.org/drawingml/2006/main">
               <a:ext uri="{FF2B5EF4-FFF2-40B4-BE49-F238E27FC236}">
-                <a16:creationId xmlns:a16="http://schemas.microsoft.com/office/drawing/2014/main" id="{647C8C9E-B0AB-4DE4-940B-CF47DC062B5F}"/>
+                <a16:creationId xmlns:a16="http://schemas.microsoft.com/office/drawing/2014/main" id="{B75C69BB-7187-4188-B151-837B3719F5B4}"/>
               </a:ext>
             </a:extLst>
           </p:cNvPr>
@@ -6056,7 +6056,7 @@
           <p:cNvPr id="11" name="">
             <a:extLst xmlns:a="http://schemas.openxmlformats.org/drawingml/2006/main">
               <a:ext uri="{FF2B5EF4-FFF2-40B4-BE49-F238E27FC236}">
-                <a16:creationId xmlns:a16="http://schemas.microsoft.com/office/drawing/2014/main" id="{F49C9063-B467-4F2B-BF6E-C8D93A7A58D0}"/>
+                <a16:creationId xmlns:a16="http://schemas.microsoft.com/office/drawing/2014/main" id="{D7D6E16C-3297-4AAC-9610-85148C3D3DE2}"/>
               </a:ext>
             </a:extLst>
           </p:cNvPr>
@@ -6088,7 +6088,7 @@
           <p:cNvPr id="12" name="">
             <a:extLst xmlns:a="http://schemas.openxmlformats.org/drawingml/2006/main">
               <a:ext uri="{FF2B5EF4-FFF2-40B4-BE49-F238E27FC236}">
-                <a16:creationId xmlns:a16="http://schemas.microsoft.com/office/drawing/2014/main" id="{7DBF4B01-BD18-4B4A-9074-3FAED79B80EC}"/>
+                <a16:creationId xmlns:a16="http://schemas.microsoft.com/office/drawing/2014/main" id="{6FB12259-5722-4416-AEAB-704BAEE53E41}"/>
               </a:ext>
             </a:extLst>
           </p:cNvPr>
@@ -6145,7 +6145,7 @@
           <p:cNvPr id="13" name="">
             <a:extLst xmlns:a="http://schemas.openxmlformats.org/drawingml/2006/main">
               <a:ext uri="{FF2B5EF4-FFF2-40B4-BE49-F238E27FC236}">
-                <a16:creationId xmlns:a16="http://schemas.microsoft.com/office/drawing/2014/main" id="{725369F8-12F4-49F7-857B-92B2A41B23C1}"/>
+                <a16:creationId xmlns:a16="http://schemas.microsoft.com/office/drawing/2014/main" id="{FD6975D3-A18E-4123-9C3B-D8E801ED794A}"/>
               </a:ext>
             </a:extLst>
           </p:cNvPr>
@@ -6202,7 +6202,7 @@
           <p:cNvPr id="14" name="">
             <a:extLst xmlns:a="http://schemas.openxmlformats.org/drawingml/2006/main">
               <a:ext uri="{FF2B5EF4-FFF2-40B4-BE49-F238E27FC236}">
-                <a16:creationId xmlns:a16="http://schemas.microsoft.com/office/drawing/2014/main" id="{F5E59ABD-18A6-4A5F-BB80-6274217C18BB}"/>
+                <a16:creationId xmlns:a16="http://schemas.microsoft.com/office/drawing/2014/main" id="{C1B7AFB6-EEA5-4E42-9EA0-F0ECE042EF63}"/>
               </a:ext>
             </a:extLst>
           </p:cNvPr>
@@ -6236,7 +6236,7 @@
           <p:cNvPr id="15" name="">
             <a:extLst xmlns:a="http://schemas.openxmlformats.org/drawingml/2006/main">
               <a:ext uri="{FF2B5EF4-FFF2-40B4-BE49-F238E27FC236}">
-                <a16:creationId xmlns:a16="http://schemas.microsoft.com/office/drawing/2014/main" id="{00AA0882-5B7E-46B2-A7EC-F80047528B4C}"/>
+                <a16:creationId xmlns:a16="http://schemas.microsoft.com/office/drawing/2014/main" id="{DAE5A0F2-3357-45F3-BB94-9081303ADC82}"/>
               </a:ext>
             </a:extLst>
           </p:cNvPr>
@@ -6268,7 +6268,7 @@
           <p:cNvPr id="16" name="">
             <a:extLst xmlns:a="http://schemas.openxmlformats.org/drawingml/2006/main">
               <a:ext uri="{FF2B5EF4-FFF2-40B4-BE49-F238E27FC236}">
-                <a16:creationId xmlns:a16="http://schemas.microsoft.com/office/drawing/2014/main" id="{E29E6C82-4EBB-42DA-A102-985866036B5A}"/>
+                <a16:creationId xmlns:a16="http://schemas.microsoft.com/office/drawing/2014/main" id="{C4C7BD09-5B5F-4664-AB20-63BB78BFCA7E}"/>
               </a:ext>
             </a:extLst>
           </p:cNvPr>
@@ -6325,7 +6325,7 @@
           <p:cNvPr id="17" name="">
             <a:extLst xmlns:a="http://schemas.openxmlformats.org/drawingml/2006/main">
               <a:ext uri="{FF2B5EF4-FFF2-40B4-BE49-F238E27FC236}">
-                <a16:creationId xmlns:a16="http://schemas.microsoft.com/office/drawing/2014/main" id="{526FF352-AACD-4452-BB75-AD275C0A11F7}"/>
+                <a16:creationId xmlns:a16="http://schemas.microsoft.com/office/drawing/2014/main" id="{93D89E56-3FD4-463B-8CEF-C3013E5B6066}"/>
               </a:ext>
             </a:extLst>
           </p:cNvPr>
@@ -6382,7 +6382,7 @@
           <p:cNvPr id="18" name="">
             <a:extLst xmlns:a="http://schemas.openxmlformats.org/drawingml/2006/main">
               <a:ext uri="{FF2B5EF4-FFF2-40B4-BE49-F238E27FC236}">
-                <a16:creationId xmlns:a16="http://schemas.microsoft.com/office/drawing/2014/main" id="{68BFDBBE-A375-46D1-8E72-119A8314A041}"/>
+                <a16:creationId xmlns:a16="http://schemas.microsoft.com/office/drawing/2014/main" id="{CAC5A1E1-F37B-450A-B8DD-042998A2F960}"/>
               </a:ext>
             </a:extLst>
           </p:cNvPr>
@@ -6416,7 +6416,7 @@
           <p:cNvPr id="19" name="">
             <a:extLst xmlns:a="http://schemas.openxmlformats.org/drawingml/2006/main">
               <a:ext uri="{FF2B5EF4-FFF2-40B4-BE49-F238E27FC236}">
-                <a16:creationId xmlns:a16="http://schemas.microsoft.com/office/drawing/2014/main" id="{A0344C2B-DDD5-4BE2-B7E5-FB30A095BBFC}"/>
+                <a16:creationId xmlns:a16="http://schemas.microsoft.com/office/drawing/2014/main" id="{80FED88C-AFF5-4B72-99CB-6D6067E875D0}"/>
               </a:ext>
             </a:extLst>
           </p:cNvPr>
@@ -6448,7 +6448,7 @@
           <p:cNvPr id="20" name="">
             <a:extLst xmlns:a="http://schemas.openxmlformats.org/drawingml/2006/main">
               <a:ext uri="{FF2B5EF4-FFF2-40B4-BE49-F238E27FC236}">
-                <a16:creationId xmlns:a16="http://schemas.microsoft.com/office/drawing/2014/main" id="{9E70FB93-470E-4F6B-95F2-7576BE0E6DA3}"/>
+                <a16:creationId xmlns:a16="http://schemas.microsoft.com/office/drawing/2014/main" id="{C0366D37-6AC9-4C04-9519-161444D79AE5}"/>
               </a:ext>
             </a:extLst>
           </p:cNvPr>
@@ -6505,7 +6505,7 @@
           <p:cNvPr id="21" name="">
             <a:extLst xmlns:a="http://schemas.openxmlformats.org/drawingml/2006/main">
               <a:ext uri="{FF2B5EF4-FFF2-40B4-BE49-F238E27FC236}">
-                <a16:creationId xmlns:a16="http://schemas.microsoft.com/office/drawing/2014/main" id="{3B8CB6BC-AA2F-401A-A33B-4A1ED66933F3}"/>
+                <a16:creationId xmlns:a16="http://schemas.microsoft.com/office/drawing/2014/main" id="{0EF18C35-A642-48A1-BF35-179A31EF8C29}"/>
               </a:ext>
             </a:extLst>
           </p:cNvPr>
@@ -6562,7 +6562,7 @@
           <p:cNvPr id="22" name="">
             <a:extLst xmlns:a="http://schemas.openxmlformats.org/drawingml/2006/main">
               <a:ext uri="{FF2B5EF4-FFF2-40B4-BE49-F238E27FC236}">
-                <a16:creationId xmlns:a16="http://schemas.microsoft.com/office/drawing/2014/main" id="{4A869E47-EA41-4200-A0E3-A344BCEEA674}"/>
+                <a16:creationId xmlns:a16="http://schemas.microsoft.com/office/drawing/2014/main" id="{079F025A-85FE-4CC7-AD5C-A17F9094DF04}"/>
               </a:ext>
             </a:extLst>
           </p:cNvPr>
@@ -6617,7 +6617,7 @@
     </p:spTree>
     <p:extLst>
       <p:ext uri="{BB962C8B-B14F-4D97-AF65-F5344CB8AC3E}">
-        <p14:creationId xmlns:p14="http://schemas.microsoft.com/office/powerpoint/2010/main" val="627182595"/>
+        <p14:creationId xmlns:p14="http://schemas.microsoft.com/office/powerpoint/2010/main" val="998691013"/>
       </p:ext>
     </p:extLst>
   </p:cSld>
@@ -6818,7 +6818,7 @@
           <p:cNvPr id="16" name="">
             <a:extLst xmlns:a="http://schemas.openxmlformats.org/drawingml/2006/main">
               <a:ext uri="{FF2B5EF4-FFF2-40B4-BE49-F238E27FC236}">
-                <a16:creationId xmlns:a16="http://schemas.microsoft.com/office/drawing/2014/main" id="{65DE882A-7AFC-47B2-B939-1E6E9731B6AF}"/>
+                <a16:creationId xmlns:a16="http://schemas.microsoft.com/office/drawing/2014/main" id="{FBEE343A-C041-40A0-B2FE-C0BF64E91034}"/>
               </a:ext>
             </a:extLst>
           </p:cNvPr>
@@ -6850,7 +6850,7 @@
           <p:cNvPr id="2" name="">
             <a:extLst xmlns:a="http://schemas.openxmlformats.org/drawingml/2006/main">
               <a:ext uri="{FF2B5EF4-FFF2-40B4-BE49-F238E27FC236}">
-                <a16:creationId xmlns:a16="http://schemas.microsoft.com/office/drawing/2014/main" id="{B8773064-13E7-476A-90DD-8BD8571BC91F}"/>
+                <a16:creationId xmlns:a16="http://schemas.microsoft.com/office/drawing/2014/main" id="{D0AC3C01-3A8D-4CE9-AD77-36A0266F7919}"/>
               </a:ext>
             </a:extLst>
           </p:cNvPr>
@@ -6907,7 +6907,7 @@
           <p:cNvPr id="3" name="">
             <a:extLst xmlns:a="http://schemas.openxmlformats.org/drawingml/2006/main">
               <a:ext uri="{FF2B5EF4-FFF2-40B4-BE49-F238E27FC236}">
-                <a16:creationId xmlns:a16="http://schemas.microsoft.com/office/drawing/2014/main" id="{8337721C-BDEC-4BD9-A1D2-77CE2F23039D}"/>
+                <a16:creationId xmlns:a16="http://schemas.microsoft.com/office/drawing/2014/main" id="{07965A75-C4EA-4989-94C2-BBED3072C17F}"/>
               </a:ext>
             </a:extLst>
           </p:cNvPr>
@@ -6939,7 +6939,7 @@
           <p:cNvPr id="4" name="">
             <a:extLst xmlns:a="http://schemas.openxmlformats.org/drawingml/2006/main">
               <a:ext uri="{FF2B5EF4-FFF2-40B4-BE49-F238E27FC236}">
-                <a16:creationId xmlns:a16="http://schemas.microsoft.com/office/drawing/2014/main" id="{EA6DE91B-9043-4AAD-B8FF-2A0A7B9817EC}"/>
+                <a16:creationId xmlns:a16="http://schemas.microsoft.com/office/drawing/2014/main" id="{E7B7FDD7-25FD-48DC-996D-D19B0529A470}"/>
               </a:ext>
             </a:extLst>
           </p:cNvPr>
@@ -6996,7 +6996,7 @@
           <p:cNvPr id="5" name="">
             <a:extLst xmlns:a="http://schemas.openxmlformats.org/drawingml/2006/main">
               <a:ext uri="{FF2B5EF4-FFF2-40B4-BE49-F238E27FC236}">
-                <a16:creationId xmlns:a16="http://schemas.microsoft.com/office/drawing/2014/main" id="{FBB646CF-B386-4AED-A224-FAE1EB1A08CC}"/>
+                <a16:creationId xmlns:a16="http://schemas.microsoft.com/office/drawing/2014/main" id="{72C20F4B-BF7A-4B5A-A525-051AE6323740}"/>
               </a:ext>
             </a:extLst>
           </p:cNvPr>
@@ -7053,7 +7053,7 @@
           <p:cNvPr id="6" name="">
             <a:extLst xmlns:a="http://schemas.openxmlformats.org/drawingml/2006/main">
               <a:ext uri="{FF2B5EF4-FFF2-40B4-BE49-F238E27FC236}">
-                <a16:creationId xmlns:a16="http://schemas.microsoft.com/office/drawing/2014/main" id="{F2659E28-EC84-4AAD-A220-E0DA1F2AD013}"/>
+                <a16:creationId xmlns:a16="http://schemas.microsoft.com/office/drawing/2014/main" id="{DCDFD5B4-F783-4E03-B4E8-DD2917BA4A69}"/>
               </a:ext>
             </a:extLst>
           </p:cNvPr>
@@ -7110,7 +7110,7 @@
           <p:cNvPr id="7" name="">
             <a:extLst xmlns:a="http://schemas.openxmlformats.org/drawingml/2006/main">
               <a:ext uri="{FF2B5EF4-FFF2-40B4-BE49-F238E27FC236}">
-                <a16:creationId xmlns:a16="http://schemas.microsoft.com/office/drawing/2014/main" id="{6A7D7B77-A06A-49D1-A070-6DFBEF771150}"/>
+                <a16:creationId xmlns:a16="http://schemas.microsoft.com/office/drawing/2014/main" id="{3631DD8A-89C9-4D4D-A12F-EC7CC6D64F04}"/>
               </a:ext>
             </a:extLst>
           </p:cNvPr>
@@ -7142,7 +7142,7 @@
           <p:cNvPr id="8" name="">
             <a:extLst xmlns:a="http://schemas.openxmlformats.org/drawingml/2006/main">
               <a:ext uri="{FF2B5EF4-FFF2-40B4-BE49-F238E27FC236}">
-                <a16:creationId xmlns:a16="http://schemas.microsoft.com/office/drawing/2014/main" id="{96D3F119-6592-4D86-B3C8-1A348C64C67B}"/>
+                <a16:creationId xmlns:a16="http://schemas.microsoft.com/office/drawing/2014/main" id="{3D42DFC5-7603-427F-A55C-640E3ACC1A54}"/>
               </a:ext>
             </a:extLst>
           </p:cNvPr>
@@ -7199,7 +7199,7 @@
           <p:cNvPr id="9" name="">
             <a:extLst xmlns:a="http://schemas.openxmlformats.org/drawingml/2006/main">
               <a:ext uri="{FF2B5EF4-FFF2-40B4-BE49-F238E27FC236}">
-                <a16:creationId xmlns:a16="http://schemas.microsoft.com/office/drawing/2014/main" id="{365700BE-5AEC-499E-AA70-DF33E76E95B5}"/>
+                <a16:creationId xmlns:a16="http://schemas.microsoft.com/office/drawing/2014/main" id="{56A35E9C-F41F-48C5-8407-DAF5F7AD5265}"/>
               </a:ext>
             </a:extLst>
           </p:cNvPr>
@@ -7256,7 +7256,7 @@
           <p:cNvPr id="10" name="">
             <a:extLst xmlns:a="http://schemas.openxmlformats.org/drawingml/2006/main">
               <a:ext uri="{FF2B5EF4-FFF2-40B4-BE49-F238E27FC236}">
-                <a16:creationId xmlns:a16="http://schemas.microsoft.com/office/drawing/2014/main" id="{6D73BF46-3884-45AD-9D94-A9CAD2764277}"/>
+                <a16:creationId xmlns:a16="http://schemas.microsoft.com/office/drawing/2014/main" id="{586EEAC1-B116-4134-89CE-29219CBE81A6}"/>
               </a:ext>
             </a:extLst>
           </p:cNvPr>
@@ -7313,7 +7313,7 @@
           <p:cNvPr id="11" name="">
             <a:extLst xmlns:a="http://schemas.openxmlformats.org/drawingml/2006/main">
               <a:ext uri="{FF2B5EF4-FFF2-40B4-BE49-F238E27FC236}">
-                <a16:creationId xmlns:a16="http://schemas.microsoft.com/office/drawing/2014/main" id="{460261E3-0FA3-45F4-9405-10D4548E7EFA}"/>
+                <a16:creationId xmlns:a16="http://schemas.microsoft.com/office/drawing/2014/main" id="{E979B7FB-F163-4A1B-841B-62B9AD86F8A3}"/>
               </a:ext>
             </a:extLst>
           </p:cNvPr>
@@ -7345,7 +7345,7 @@
           <p:cNvPr id="12" name="">
             <a:extLst xmlns:a="http://schemas.openxmlformats.org/drawingml/2006/main">
               <a:ext uri="{FF2B5EF4-FFF2-40B4-BE49-F238E27FC236}">
-                <a16:creationId xmlns:a16="http://schemas.microsoft.com/office/drawing/2014/main" id="{85E0D706-B3E8-4D2A-B953-708B770A1772}"/>
+                <a16:creationId xmlns:a16="http://schemas.microsoft.com/office/drawing/2014/main" id="{067DD242-FD1E-4E74-AC27-5CFE6DB9D1EC}"/>
               </a:ext>
             </a:extLst>
           </p:cNvPr>
@@ -7402,7 +7402,7 @@
           <p:cNvPr id="13" name="">
             <a:extLst xmlns:a="http://schemas.openxmlformats.org/drawingml/2006/main">
               <a:ext uri="{FF2B5EF4-FFF2-40B4-BE49-F238E27FC236}">
-                <a16:creationId xmlns:a16="http://schemas.microsoft.com/office/drawing/2014/main" id="{D5356266-840D-4ED7-833C-BAA23F0C7B80}"/>
+                <a16:creationId xmlns:a16="http://schemas.microsoft.com/office/drawing/2014/main" id="{10FD2A82-0C9A-40B6-A180-8C9225B9DF84}"/>
               </a:ext>
             </a:extLst>
           </p:cNvPr>
@@ -7459,7 +7459,7 @@
           <p:cNvPr id="14" name="">
             <a:extLst xmlns:a="http://schemas.openxmlformats.org/drawingml/2006/main">
               <a:ext uri="{FF2B5EF4-FFF2-40B4-BE49-F238E27FC236}">
-                <a16:creationId xmlns:a16="http://schemas.microsoft.com/office/drawing/2014/main" id="{5ECCD7E4-5777-4554-B02A-48491EFEBCEC}"/>
+                <a16:creationId xmlns:a16="http://schemas.microsoft.com/office/drawing/2014/main" id="{D07C9557-0432-48B1-B542-05E62D3F8243}"/>
               </a:ext>
             </a:extLst>
           </p:cNvPr>
@@ -7516,7 +7516,7 @@
           <p:cNvPr id="15" name="">
             <a:extLst xmlns:a="http://schemas.openxmlformats.org/drawingml/2006/main">
               <a:ext uri="{FF2B5EF4-FFF2-40B4-BE49-F238E27FC236}">
-                <a16:creationId xmlns:a16="http://schemas.microsoft.com/office/drawing/2014/main" id="{DB5FAFAA-9F1E-4B6C-85CC-913F4E7F9379}"/>
+                <a16:creationId xmlns:a16="http://schemas.microsoft.com/office/drawing/2014/main" id="{F69C976B-7DB5-4750-9653-77D22FA2A129}"/>
               </a:ext>
             </a:extLst>
           </p:cNvPr>
@@ -7571,7 +7571,7 @@
     </p:spTree>
     <p:extLst>
       <p:ext uri="{BB962C8B-B14F-4D97-AF65-F5344CB8AC3E}">
-        <p14:creationId xmlns:p14="http://schemas.microsoft.com/office/powerpoint/2010/main" val="706943782"/>
+        <p14:creationId xmlns:p14="http://schemas.microsoft.com/office/powerpoint/2010/main" val="1070966315"/>
       </p:ext>
     </p:extLst>
   </p:cSld>
@@ -7772,7 +7772,7 @@
           <p:cNvPr id="23" name="">
             <a:extLst xmlns:a="http://schemas.openxmlformats.org/drawingml/2006/main">
               <a:ext uri="{FF2B5EF4-FFF2-40B4-BE49-F238E27FC236}">
-                <a16:creationId xmlns:a16="http://schemas.microsoft.com/office/drawing/2014/main" id="{C07D4651-F1A5-4488-AFD3-6FECB5B77E17}"/>
+                <a16:creationId xmlns:a16="http://schemas.microsoft.com/office/drawing/2014/main" id="{741EDAE4-52E6-426C-950E-08CE7FBE9AE4}"/>
               </a:ext>
             </a:extLst>
           </p:cNvPr>
@@ -7804,7 +7804,7 @@
           <p:cNvPr id="2" name="">
             <a:extLst xmlns:a="http://schemas.openxmlformats.org/drawingml/2006/main">
               <a:ext uri="{FF2B5EF4-FFF2-40B4-BE49-F238E27FC236}">
-                <a16:creationId xmlns:a16="http://schemas.microsoft.com/office/drawing/2014/main" id="{853CF6A0-4506-494C-8249-CE45C70E33D8}"/>
+                <a16:creationId xmlns:a16="http://schemas.microsoft.com/office/drawing/2014/main" id="{E5F57439-5026-41D5-B483-473819B0ACC5}"/>
               </a:ext>
             </a:extLst>
           </p:cNvPr>
@@ -7861,7 +7861,7 @@
           <p:cNvPr id="3" name="">
             <a:extLst xmlns:a="http://schemas.openxmlformats.org/drawingml/2006/main">
               <a:ext uri="{FF2B5EF4-FFF2-40B4-BE49-F238E27FC236}">
-                <a16:creationId xmlns:a16="http://schemas.microsoft.com/office/drawing/2014/main" id="{0A50B0EB-1181-4B19-A461-BF6D1CAE6A0E}"/>
+                <a16:creationId xmlns:a16="http://schemas.microsoft.com/office/drawing/2014/main" id="{7D616CD0-0451-48B1-B211-8809E80EF1D3}"/>
               </a:ext>
             </a:extLst>
           </p:cNvPr>
@@ -7893,7 +7893,7 @@
           <p:cNvPr id="4" name="">
             <a:extLst xmlns:a="http://schemas.openxmlformats.org/drawingml/2006/main">
               <a:ext uri="{FF2B5EF4-FFF2-40B4-BE49-F238E27FC236}">
-                <a16:creationId xmlns:a16="http://schemas.microsoft.com/office/drawing/2014/main" id="{99DC8CBE-7131-414D-BD3A-FF746C6AA09C}"/>
+                <a16:creationId xmlns:a16="http://schemas.microsoft.com/office/drawing/2014/main" id="{23BCFAE6-3C19-4342-8487-65BFA79A6662}"/>
               </a:ext>
             </a:extLst>
           </p:cNvPr>
@@ -7950,7 +7950,7 @@
           <p:cNvPr id="5" name="">
             <a:extLst xmlns:a="http://schemas.openxmlformats.org/drawingml/2006/main">
               <a:ext uri="{FF2B5EF4-FFF2-40B4-BE49-F238E27FC236}">
-                <a16:creationId xmlns:a16="http://schemas.microsoft.com/office/drawing/2014/main" id="{F96ADBEC-4CAA-4708-8979-2E63CEDA5F3F}"/>
+                <a16:creationId xmlns:a16="http://schemas.microsoft.com/office/drawing/2014/main" id="{314D6283-A309-4BCE-BF84-A87C90F228DE}"/>
               </a:ext>
             </a:extLst>
           </p:cNvPr>
@@ -8007,7 +8007,7 @@
           <p:cNvPr id="6" name="">
             <a:extLst xmlns:a="http://schemas.openxmlformats.org/drawingml/2006/main">
               <a:ext uri="{FF2B5EF4-FFF2-40B4-BE49-F238E27FC236}">
-                <a16:creationId xmlns:a16="http://schemas.microsoft.com/office/drawing/2014/main" id="{457036A1-8408-4023-978D-4B12F6560538}"/>
+                <a16:creationId xmlns:a16="http://schemas.microsoft.com/office/drawing/2014/main" id="{0C7DFE67-EDCB-4A25-8331-0C70973471E2}"/>
               </a:ext>
             </a:extLst>
           </p:cNvPr>
@@ -8064,7 +8064,7 @@
           <p:cNvPr id="7" name="">
             <a:extLst xmlns:a="http://schemas.openxmlformats.org/drawingml/2006/main">
               <a:ext uri="{FF2B5EF4-FFF2-40B4-BE49-F238E27FC236}">
-                <a16:creationId xmlns:a16="http://schemas.microsoft.com/office/drawing/2014/main" id="{195D3A83-30A8-4BF0-B43D-735787258522}"/>
+                <a16:creationId xmlns:a16="http://schemas.microsoft.com/office/drawing/2014/main" id="{A7560581-C93A-4746-B3AC-02ECBB8909A9}"/>
               </a:ext>
             </a:extLst>
           </p:cNvPr>
@@ -8096,7 +8096,7 @@
           <p:cNvPr id="8" name="">
             <a:extLst xmlns:a="http://schemas.openxmlformats.org/drawingml/2006/main">
               <a:ext uri="{FF2B5EF4-FFF2-40B4-BE49-F238E27FC236}">
-                <a16:creationId xmlns:a16="http://schemas.microsoft.com/office/drawing/2014/main" id="{0C24E53F-E258-4E2A-A9A5-4787E87EDFEB}"/>
+                <a16:creationId xmlns:a16="http://schemas.microsoft.com/office/drawing/2014/main" id="{CE931006-F951-4AC2-A68D-D2E3796B528E}"/>
               </a:ext>
             </a:extLst>
           </p:cNvPr>
@@ -8153,7 +8153,7 @@
           <p:cNvPr id="9" name="">
             <a:extLst xmlns:a="http://schemas.openxmlformats.org/drawingml/2006/main">
               <a:ext uri="{FF2B5EF4-FFF2-40B4-BE49-F238E27FC236}">
-                <a16:creationId xmlns:a16="http://schemas.microsoft.com/office/drawing/2014/main" id="{E6B47E34-DB19-4B87-83BF-B84C0F692FA4}"/>
+                <a16:creationId xmlns:a16="http://schemas.microsoft.com/office/drawing/2014/main" id="{BE58A0A3-79D9-419F-A2AB-A7FAE94A0889}"/>
               </a:ext>
             </a:extLst>
           </p:cNvPr>
@@ -8210,19 +8210,19 @@
           <p:cNvPr id="10" name="">
             <a:extLst xmlns:a="http://schemas.openxmlformats.org/drawingml/2006/main">
               <a:ext uri="{FF2B5EF4-FFF2-40B4-BE49-F238E27FC236}">
-                <a16:creationId xmlns:a16="http://schemas.microsoft.com/office/drawing/2014/main" id="{E8303353-405F-4466-8CFC-018FD993A777}"/>
-              </a:ext>
-            </a:extLst>
-          </p:cNvPr>
-          <p:cNvSpPr>
-            <a:spLocks xmlns:a="http://schemas.openxmlformats.org/drawingml/2006/main" noGrp="1"/>
-          </p:cNvSpPr>
-          <p:nvPr/>
-        </p:nvSpPr>
-        <p:spPr>
-          <a:xfrm xmlns:a="http://schemas.openxmlformats.org/drawingml/2006/main">
-            <a:off x="914400" y="1257300"/>
-            <a:ext cx="10363200" cy="781050"/>
+                <a16:creationId xmlns:a16="http://schemas.microsoft.com/office/drawing/2014/main" id="{1E35C663-FC8E-48E7-8104-929DD46BC28F}"/>
+              </a:ext>
+            </a:extLst>
+          </p:cNvPr>
+          <p:cNvSpPr>
+            <a:spLocks xmlns:a="http://schemas.openxmlformats.org/drawingml/2006/main" noGrp="1"/>
+          </p:cNvSpPr>
+          <p:nvPr/>
+        </p:nvSpPr>
+        <p:spPr>
+          <a:xfrm xmlns:a="http://schemas.openxmlformats.org/drawingml/2006/main">
+            <a:off x="857250" y="1219200"/>
+            <a:ext cx="10477500" cy="742950"/>
           </a:xfrm>
           <a:prstGeom xmlns:a="http://schemas.openxmlformats.org/drawingml/2006/main" prst="rect">
             <a:avLst/>
@@ -8239,7 +8239,7 @@
           <a:lstStyle xmlns:a="http://schemas.openxmlformats.org/drawingml/2006/main"/>
           <a:p xmlns:a="http://schemas.openxmlformats.org/drawingml/2006/main">
             <a:pPr algn="ctr">
-              <a:defRPr sz="2175" b="1">
+              <a:defRPr sz="2100" b="1">
                 <a:solidFill>
                   <a:srgbClr val="17253A"/>
                 </a:solidFill>
@@ -8249,7 +8249,7 @@
               </a:defRPr>
             </a:pPr>
             <a:r>
-              <a:rPr sz="2175" b="1">
+              <a:rPr sz="2100" b="1">
                 <a:solidFill>
                   <a:srgbClr val="17253A"/>
                 </a:solidFill>
@@ -8267,28 +8267,30 @@
           <p:cNvPr id="11" name="">
             <a:extLst xmlns:a="http://schemas.openxmlformats.org/drawingml/2006/main">
               <a:ext uri="{FF2B5EF4-FFF2-40B4-BE49-F238E27FC236}">
-                <a16:creationId xmlns:a16="http://schemas.microsoft.com/office/drawing/2014/main" id="{870E41BB-8EE2-4348-8749-A0955D5666B7}"/>
-              </a:ext>
-            </a:extLst>
-          </p:cNvPr>
-          <p:cNvSpPr>
-            <a:spLocks xmlns:a="http://schemas.openxmlformats.org/drawingml/2006/main" noGrp="1"/>
-          </p:cNvSpPr>
-          <p:nvPr/>
-        </p:nvSpPr>
-        <p:spPr>
-          <a:xfrm xmlns:a="http://schemas.openxmlformats.org/drawingml/2006/main">
-            <a:off x="1000125" y="2247900"/>
-            <a:ext cx="476250" cy="476250"/>
-          </a:xfrm>
-          <a:prstGeom xmlns:a="http://schemas.openxmlformats.org/drawingml/2006/main" prst="ellipse">
+                <a16:creationId xmlns:a16="http://schemas.microsoft.com/office/drawing/2014/main" id="{4ED7089A-89FA-4CC4-9F62-791BFD81BBE9}"/>
+              </a:ext>
+            </a:extLst>
+          </p:cNvPr>
+          <p:cNvSpPr>
+            <a:spLocks xmlns:a="http://schemas.openxmlformats.org/drawingml/2006/main" noGrp="1"/>
+          </p:cNvSpPr>
+          <p:nvPr/>
+        </p:nvSpPr>
+        <p:spPr>
+          <a:xfrm xmlns:a="http://schemas.openxmlformats.org/drawingml/2006/main">
+            <a:off x="971550" y="2124075"/>
+            <a:ext cx="38100" cy="3524250"/>
+          </a:xfrm>
+          <a:prstGeom xmlns:a="http://schemas.openxmlformats.org/drawingml/2006/main" prst="rect">
             <a:avLst/>
           </a:prstGeom>
           <a:solidFill xmlns:a="http://schemas.openxmlformats.org/drawingml/2006/main">
-            <a:srgbClr val="18324A"/>
+            <a:srgbClr val="2C6E73"/>
           </a:solidFill>
           <a:ln xmlns:a="http://schemas.openxmlformats.org/drawingml/2006/main" w="0">
-            <a:noFill/>
+            <a:solidFill>
+              <a:srgbClr val="2C6E73"/>
+            </a:solidFill>
           </a:ln>
         </p:spPr>
       </p:sp>
@@ -8297,19 +8299,19 @@
           <p:cNvPr id="12" name="">
             <a:extLst xmlns:a="http://schemas.openxmlformats.org/drawingml/2006/main">
               <a:ext uri="{FF2B5EF4-FFF2-40B4-BE49-F238E27FC236}">
-                <a16:creationId xmlns:a16="http://schemas.microsoft.com/office/drawing/2014/main" id="{4031C8A4-3B5B-42E9-949A-09CF6D078690}"/>
-              </a:ext>
-            </a:extLst>
-          </p:cNvPr>
-          <p:cNvSpPr>
-            <a:spLocks xmlns:a="http://schemas.openxmlformats.org/drawingml/2006/main" noGrp="1"/>
-          </p:cNvSpPr>
-          <p:nvPr/>
-        </p:nvSpPr>
-        <p:spPr>
-          <a:xfrm xmlns:a="http://schemas.openxmlformats.org/drawingml/2006/main">
-            <a:off x="1000125" y="2276475"/>
-            <a:ext cx="476250" cy="419100"/>
+                <a16:creationId xmlns:a16="http://schemas.microsoft.com/office/drawing/2014/main" id="{26120C37-0185-43FA-9B11-884F89EE4236}"/>
+              </a:ext>
+            </a:extLst>
+          </p:cNvPr>
+          <p:cNvSpPr>
+            <a:spLocks xmlns:a="http://schemas.openxmlformats.org/drawingml/2006/main" noGrp="1"/>
+          </p:cNvSpPr>
+          <p:nvPr/>
+        </p:nvSpPr>
+        <p:spPr>
+          <a:xfrm xmlns:a="http://schemas.openxmlformats.org/drawingml/2006/main">
+            <a:off x="1162050" y="2200275"/>
+            <a:ext cx="400050" cy="400050"/>
           </a:xfrm>
           <a:prstGeom xmlns:a="http://schemas.openxmlformats.org/drawingml/2006/main" prst="rect">
             <a:avLst/>
@@ -8326,9 +8328,9 @@
           <a:lstStyle xmlns:a="http://schemas.openxmlformats.org/drawingml/2006/main"/>
           <a:p xmlns:a="http://schemas.openxmlformats.org/drawingml/2006/main">
             <a:pPr algn="ctr">
-              <a:defRPr sz="1350" b="1">
-                <a:solidFill>
-                  <a:srgbClr val="FFFFFF"/>
+              <a:defRPr sz="1125" b="1">
+                <a:solidFill>
+                  <a:srgbClr val="2C6E73"/>
                 </a:solidFill>
                 <a:latin typeface="Arial"/>
                 <a:ea typeface="Arial"/>
@@ -8336,9 +8338,9 @@
               </a:defRPr>
             </a:pPr>
             <a:r>
-              <a:rPr sz="1350" b="1">
-                <a:solidFill>
-                  <a:srgbClr val="FFFFFF"/>
+              <a:rPr sz="1125" b="1">
+                <a:solidFill>
+                  <a:srgbClr val="2C6E73"/>
                 </a:solidFill>
                 <a:latin typeface="Arial"/>
                 <a:ea typeface="Arial"/>
@@ -8354,19 +8356,19 @@
           <p:cNvPr id="13" name="">
             <a:extLst xmlns:a="http://schemas.openxmlformats.org/drawingml/2006/main">
               <a:ext uri="{FF2B5EF4-FFF2-40B4-BE49-F238E27FC236}">
-                <a16:creationId xmlns:a16="http://schemas.microsoft.com/office/drawing/2014/main" id="{E3EA8961-2933-4D0C-9514-01E489D6EC47}"/>
-              </a:ext>
-            </a:extLst>
-          </p:cNvPr>
-          <p:cNvSpPr>
-            <a:spLocks xmlns:a="http://schemas.openxmlformats.org/drawingml/2006/main" noGrp="1"/>
-          </p:cNvSpPr>
-          <p:nvPr/>
-        </p:nvSpPr>
-        <p:spPr>
-          <a:xfrm xmlns:a="http://schemas.openxmlformats.org/drawingml/2006/main">
-            <a:off x="1714500" y="2181225"/>
-            <a:ext cx="9429750" cy="609600"/>
+                <a16:creationId xmlns:a16="http://schemas.microsoft.com/office/drawing/2014/main" id="{465E0486-6D2B-405B-AA90-752352E92767}"/>
+              </a:ext>
+            </a:extLst>
+          </p:cNvPr>
+          <p:cNvSpPr>
+            <a:spLocks xmlns:a="http://schemas.openxmlformats.org/drawingml/2006/main" noGrp="1"/>
+          </p:cNvSpPr>
+          <p:nvPr/>
+        </p:nvSpPr>
+        <p:spPr>
+          <a:xfrm xmlns:a="http://schemas.openxmlformats.org/drawingml/2006/main">
+            <a:off x="1714500" y="2114550"/>
+            <a:ext cx="9525000" cy="809625"/>
           </a:xfrm>
           <a:prstGeom xmlns:a="http://schemas.openxmlformats.org/drawingml/2006/main" prst="rect">
             <a:avLst/>
@@ -8383,7 +8385,7 @@
           <a:lstStyle xmlns:a="http://schemas.openxmlformats.org/drawingml/2006/main"/>
           <a:p xmlns:a="http://schemas.openxmlformats.org/drawingml/2006/main">
             <a:pPr algn="l">
-              <a:defRPr sz="1500" b="0">
+              <a:defRPr sz="1725" b="0">
                 <a:solidFill>
                   <a:srgbClr val="17253A"/>
                 </a:solidFill>
@@ -8393,7 +8395,7 @@
               </a:defRPr>
             </a:pPr>
             <a:r>
-              <a:rPr sz="1500" b="0">
+              <a:rPr sz="1725" b="0">
                 <a:solidFill>
                   <a:srgbClr val="17253A"/>
                 </a:solidFill>
@@ -8401,7 +8403,7 @@
                 <a:ea typeface="Arial"/>
                 <a:cs typeface="Arial"/>
               </a:rPr>
-              <a:t>Identify the structure: Keep both sides balanced and identify the outer operation.</a:t>
+              <a:t>3x + 14 = 65</a:t>
             </a:r>
           </a:p>
         </p:txBody>
@@ -8411,28 +8413,30 @@
           <p:cNvPr id="14" name="">
             <a:extLst xmlns:a="http://schemas.openxmlformats.org/drawingml/2006/main">
               <a:ext uri="{FF2B5EF4-FFF2-40B4-BE49-F238E27FC236}">
-                <a16:creationId xmlns:a16="http://schemas.microsoft.com/office/drawing/2014/main" id="{0613BD39-C464-42D7-8E2D-31A19DDF802F}"/>
-              </a:ext>
-            </a:extLst>
-          </p:cNvPr>
-          <p:cNvSpPr>
-            <a:spLocks xmlns:a="http://schemas.openxmlformats.org/drawingml/2006/main" noGrp="1"/>
-          </p:cNvSpPr>
-          <p:nvPr/>
-        </p:nvSpPr>
-        <p:spPr>
-          <a:xfrm xmlns:a="http://schemas.openxmlformats.org/drawingml/2006/main">
-            <a:off x="1000125" y="2990850"/>
-            <a:ext cx="476250" cy="476250"/>
-          </a:xfrm>
-          <a:prstGeom xmlns:a="http://schemas.openxmlformats.org/drawingml/2006/main" prst="ellipse">
+                <a16:creationId xmlns:a16="http://schemas.microsoft.com/office/drawing/2014/main" id="{718B3085-39CC-4D7F-BFFD-E8361694CE1F}"/>
+              </a:ext>
+            </a:extLst>
+          </p:cNvPr>
+          <p:cNvSpPr>
+            <a:spLocks xmlns:a="http://schemas.openxmlformats.org/drawingml/2006/main" noGrp="1"/>
+          </p:cNvSpPr>
+          <p:nvPr/>
+        </p:nvSpPr>
+        <p:spPr>
+          <a:xfrm xmlns:a="http://schemas.openxmlformats.org/drawingml/2006/main">
+            <a:off x="1714500" y="2943225"/>
+            <a:ext cx="9334500" cy="9525"/>
+          </a:xfrm>
+          <a:prstGeom xmlns:a="http://schemas.openxmlformats.org/drawingml/2006/main" prst="rect">
             <a:avLst/>
           </a:prstGeom>
           <a:solidFill xmlns:a="http://schemas.openxmlformats.org/drawingml/2006/main">
-            <a:srgbClr val="2C6E73"/>
+            <a:srgbClr val="D9E0E6"/>
           </a:solidFill>
           <a:ln xmlns:a="http://schemas.openxmlformats.org/drawingml/2006/main" w="0">
-            <a:noFill/>
+            <a:solidFill>
+              <a:srgbClr val="D9E0E6"/>
+            </a:solidFill>
           </a:ln>
         </p:spPr>
       </p:sp>
@@ -8441,19 +8445,19 @@
           <p:cNvPr id="15" name="">
             <a:extLst xmlns:a="http://schemas.openxmlformats.org/drawingml/2006/main">
               <a:ext uri="{FF2B5EF4-FFF2-40B4-BE49-F238E27FC236}">
-                <a16:creationId xmlns:a16="http://schemas.microsoft.com/office/drawing/2014/main" id="{1578DA72-4E71-45F1-B865-6E40C39C34F2}"/>
-              </a:ext>
-            </a:extLst>
-          </p:cNvPr>
-          <p:cNvSpPr>
-            <a:spLocks xmlns:a="http://schemas.openxmlformats.org/drawingml/2006/main" noGrp="1"/>
-          </p:cNvSpPr>
-          <p:nvPr/>
-        </p:nvSpPr>
-        <p:spPr>
-          <a:xfrm xmlns:a="http://schemas.openxmlformats.org/drawingml/2006/main">
-            <a:off x="1000125" y="3019425"/>
-            <a:ext cx="476250" cy="419100"/>
+                <a16:creationId xmlns:a16="http://schemas.microsoft.com/office/drawing/2014/main" id="{3D34818D-7C85-4E76-BF0E-E16ADBB84C20}"/>
+              </a:ext>
+            </a:extLst>
+          </p:cNvPr>
+          <p:cNvSpPr>
+            <a:spLocks xmlns:a="http://schemas.openxmlformats.org/drawingml/2006/main" noGrp="1"/>
+          </p:cNvSpPr>
+          <p:nvPr/>
+        </p:nvSpPr>
+        <p:spPr>
+          <a:xfrm xmlns:a="http://schemas.openxmlformats.org/drawingml/2006/main">
+            <a:off x="1162050" y="3076575"/>
+            <a:ext cx="400050" cy="400050"/>
           </a:xfrm>
           <a:prstGeom xmlns:a="http://schemas.openxmlformats.org/drawingml/2006/main" prst="rect">
             <a:avLst/>
@@ -8470,9 +8474,9 @@
           <a:lstStyle xmlns:a="http://schemas.openxmlformats.org/drawingml/2006/main"/>
           <a:p xmlns:a="http://schemas.openxmlformats.org/drawingml/2006/main">
             <a:pPr algn="ctr">
-              <a:defRPr sz="1350" b="1">
-                <a:solidFill>
-                  <a:srgbClr val="FFFFFF"/>
+              <a:defRPr sz="1125" b="1">
+                <a:solidFill>
+                  <a:srgbClr val="2C6E73"/>
                 </a:solidFill>
                 <a:latin typeface="Arial"/>
                 <a:ea typeface="Arial"/>
@@ -8480,9 +8484,9 @@
               </a:defRPr>
             </a:pPr>
             <a:r>
-              <a:rPr sz="1350" b="1">
-                <a:solidFill>
-                  <a:srgbClr val="FFFFFF"/>
+              <a:rPr sz="1125" b="1">
+                <a:solidFill>
+                  <a:srgbClr val="2C6E73"/>
                 </a:solidFill>
                 <a:latin typeface="Arial"/>
                 <a:ea typeface="Arial"/>
@@ -8498,19 +8502,19 @@
           <p:cNvPr id="16" name="">
             <a:extLst xmlns:a="http://schemas.openxmlformats.org/drawingml/2006/main">
               <a:ext uri="{FF2B5EF4-FFF2-40B4-BE49-F238E27FC236}">
-                <a16:creationId xmlns:a16="http://schemas.microsoft.com/office/drawing/2014/main" id="{82E44CD6-A3AB-4D0B-816E-5238E8DB083D}"/>
-              </a:ext>
-            </a:extLst>
-          </p:cNvPr>
-          <p:cNvSpPr>
-            <a:spLocks xmlns:a="http://schemas.openxmlformats.org/drawingml/2006/main" noGrp="1"/>
-          </p:cNvSpPr>
-          <p:nvPr/>
-        </p:nvSpPr>
-        <p:spPr>
-          <a:xfrm xmlns:a="http://schemas.openxmlformats.org/drawingml/2006/main">
-            <a:off x="1714500" y="2924175"/>
-            <a:ext cx="9429750" cy="609600"/>
+                <a16:creationId xmlns:a16="http://schemas.microsoft.com/office/drawing/2014/main" id="{89F75E45-0CEE-42EF-85B3-425909A3B974}"/>
+              </a:ext>
+            </a:extLst>
+          </p:cNvPr>
+          <p:cNvSpPr>
+            <a:spLocks xmlns:a="http://schemas.openxmlformats.org/drawingml/2006/main" noGrp="1"/>
+          </p:cNvSpPr>
+          <p:nvPr/>
+        </p:nvSpPr>
+        <p:spPr>
+          <a:xfrm xmlns:a="http://schemas.openxmlformats.org/drawingml/2006/main">
+            <a:off x="1714500" y="2990850"/>
+            <a:ext cx="9525000" cy="809625"/>
           </a:xfrm>
           <a:prstGeom xmlns:a="http://schemas.openxmlformats.org/drawingml/2006/main" prst="rect">
             <a:avLst/>
@@ -8527,7 +8531,7 @@
           <a:lstStyle xmlns:a="http://schemas.openxmlformats.org/drawingml/2006/main"/>
           <a:p xmlns:a="http://schemas.openxmlformats.org/drawingml/2006/main">
             <a:pPr algn="l">
-              <a:defRPr sz="1500" b="0">
+              <a:defRPr sz="1725" b="0">
                 <a:solidFill>
                   <a:srgbClr val="17253A"/>
                 </a:solidFill>
@@ -8537,7 +8541,7 @@
               </a:defRPr>
             </a:pPr>
             <a:r>
-              <a:rPr sz="1500" b="0">
+              <a:rPr sz="1725" b="0">
                 <a:solidFill>
                   <a:srgbClr val="17253A"/>
                 </a:solidFill>
@@ -8545,7 +8549,7 @@
                 <a:ea typeface="Arial"/>
                 <a:cs typeface="Arial"/>
               </a:rPr>
-              <a:t>Set up the method: Undo operations in reverse order.</a:t>
+              <a:t>Subtract 14: 3x = 51</a:t>
             </a:r>
           </a:p>
         </p:txBody>
@@ -8555,28 +8559,30 @@
           <p:cNvPr id="17" name="">
             <a:extLst xmlns:a="http://schemas.openxmlformats.org/drawingml/2006/main">
               <a:ext uri="{FF2B5EF4-FFF2-40B4-BE49-F238E27FC236}">
-                <a16:creationId xmlns:a16="http://schemas.microsoft.com/office/drawing/2014/main" id="{1A2F1882-B39E-4E3E-8954-26766C053931}"/>
-              </a:ext>
-            </a:extLst>
-          </p:cNvPr>
-          <p:cNvSpPr>
-            <a:spLocks xmlns:a="http://schemas.openxmlformats.org/drawingml/2006/main" noGrp="1"/>
-          </p:cNvSpPr>
-          <p:nvPr/>
-        </p:nvSpPr>
-        <p:spPr>
-          <a:xfrm xmlns:a="http://schemas.openxmlformats.org/drawingml/2006/main">
-            <a:off x="1000125" y="3733800"/>
-            <a:ext cx="476250" cy="476250"/>
-          </a:xfrm>
-          <a:prstGeom xmlns:a="http://schemas.openxmlformats.org/drawingml/2006/main" prst="ellipse">
+                <a16:creationId xmlns:a16="http://schemas.microsoft.com/office/drawing/2014/main" id="{C5909764-AD9A-42F0-82C8-003059539EF8}"/>
+              </a:ext>
+            </a:extLst>
+          </p:cNvPr>
+          <p:cNvSpPr>
+            <a:spLocks xmlns:a="http://schemas.openxmlformats.org/drawingml/2006/main" noGrp="1"/>
+          </p:cNvSpPr>
+          <p:nvPr/>
+        </p:nvSpPr>
+        <p:spPr>
+          <a:xfrm xmlns:a="http://schemas.openxmlformats.org/drawingml/2006/main">
+            <a:off x="1714500" y="3819525"/>
+            <a:ext cx="9334500" cy="9525"/>
+          </a:xfrm>
+          <a:prstGeom xmlns:a="http://schemas.openxmlformats.org/drawingml/2006/main" prst="rect">
             <a:avLst/>
           </a:prstGeom>
           <a:solidFill xmlns:a="http://schemas.openxmlformats.org/drawingml/2006/main">
-            <a:srgbClr val="2C6E73"/>
+            <a:srgbClr val="D9E0E6"/>
           </a:solidFill>
           <a:ln xmlns:a="http://schemas.openxmlformats.org/drawingml/2006/main" w="0">
-            <a:noFill/>
+            <a:solidFill>
+              <a:srgbClr val="D9E0E6"/>
+            </a:solidFill>
           </a:ln>
         </p:spPr>
       </p:sp>
@@ -8585,19 +8591,19 @@
           <p:cNvPr id="18" name="">
             <a:extLst xmlns:a="http://schemas.openxmlformats.org/drawingml/2006/main">
               <a:ext uri="{FF2B5EF4-FFF2-40B4-BE49-F238E27FC236}">
-                <a16:creationId xmlns:a16="http://schemas.microsoft.com/office/drawing/2014/main" id="{91C38534-E313-43FE-8317-F1B7316319BC}"/>
-              </a:ext>
-            </a:extLst>
-          </p:cNvPr>
-          <p:cNvSpPr>
-            <a:spLocks xmlns:a="http://schemas.openxmlformats.org/drawingml/2006/main" noGrp="1"/>
-          </p:cNvSpPr>
-          <p:nvPr/>
-        </p:nvSpPr>
-        <p:spPr>
-          <a:xfrm xmlns:a="http://schemas.openxmlformats.org/drawingml/2006/main">
-            <a:off x="1000125" y="3762375"/>
-            <a:ext cx="476250" cy="419100"/>
+                <a16:creationId xmlns:a16="http://schemas.microsoft.com/office/drawing/2014/main" id="{A9BAF718-159B-4CF8-8A8E-C9A45E470D40}"/>
+              </a:ext>
+            </a:extLst>
+          </p:cNvPr>
+          <p:cNvSpPr>
+            <a:spLocks xmlns:a="http://schemas.openxmlformats.org/drawingml/2006/main" noGrp="1"/>
+          </p:cNvSpPr>
+          <p:nvPr/>
+        </p:nvSpPr>
+        <p:spPr>
+          <a:xfrm xmlns:a="http://schemas.openxmlformats.org/drawingml/2006/main">
+            <a:off x="1162050" y="3952875"/>
+            <a:ext cx="400050" cy="400050"/>
           </a:xfrm>
           <a:prstGeom xmlns:a="http://schemas.openxmlformats.org/drawingml/2006/main" prst="rect">
             <a:avLst/>
@@ -8614,9 +8620,9 @@
           <a:lstStyle xmlns:a="http://schemas.openxmlformats.org/drawingml/2006/main"/>
           <a:p xmlns:a="http://schemas.openxmlformats.org/drawingml/2006/main">
             <a:pPr algn="ctr">
-              <a:defRPr sz="1350" b="1">
-                <a:solidFill>
-                  <a:srgbClr val="FFFFFF"/>
+              <a:defRPr sz="1125" b="1">
+                <a:solidFill>
+                  <a:srgbClr val="2C6E73"/>
                 </a:solidFill>
                 <a:latin typeface="Arial"/>
                 <a:ea typeface="Arial"/>
@@ -8624,9 +8630,9 @@
               </a:defRPr>
             </a:pPr>
             <a:r>
-              <a:rPr sz="1350" b="1">
-                <a:solidFill>
-                  <a:srgbClr val="FFFFFF"/>
+              <a:rPr sz="1125" b="1">
+                <a:solidFill>
+                  <a:srgbClr val="2C6E73"/>
                 </a:solidFill>
                 <a:latin typeface="Arial"/>
                 <a:ea typeface="Arial"/>
@@ -8642,19 +8648,19 @@
           <p:cNvPr id="19" name="">
             <a:extLst xmlns:a="http://schemas.openxmlformats.org/drawingml/2006/main">
               <a:ext uri="{FF2B5EF4-FFF2-40B4-BE49-F238E27FC236}">
-                <a16:creationId xmlns:a16="http://schemas.microsoft.com/office/drawing/2014/main" id="{3C5A49D7-6DC4-476E-938E-92971E4817A7}"/>
-              </a:ext>
-            </a:extLst>
-          </p:cNvPr>
-          <p:cNvSpPr>
-            <a:spLocks xmlns:a="http://schemas.openxmlformats.org/drawingml/2006/main" noGrp="1"/>
-          </p:cNvSpPr>
-          <p:nvPr/>
-        </p:nvSpPr>
-        <p:spPr>
-          <a:xfrm xmlns:a="http://schemas.openxmlformats.org/drawingml/2006/main">
-            <a:off x="1714500" y="3667125"/>
-            <a:ext cx="9429750" cy="609600"/>
+                <a16:creationId xmlns:a16="http://schemas.microsoft.com/office/drawing/2014/main" id="{848BFB8A-8AF2-406F-85A9-5EEE169A026F}"/>
+              </a:ext>
+            </a:extLst>
+          </p:cNvPr>
+          <p:cNvSpPr>
+            <a:spLocks xmlns:a="http://schemas.openxmlformats.org/drawingml/2006/main" noGrp="1"/>
+          </p:cNvSpPr>
+          <p:nvPr/>
+        </p:nvSpPr>
+        <p:spPr>
+          <a:xfrm xmlns:a="http://schemas.openxmlformats.org/drawingml/2006/main">
+            <a:off x="1714500" y="3867150"/>
+            <a:ext cx="9525000" cy="809625"/>
           </a:xfrm>
           <a:prstGeom xmlns:a="http://schemas.openxmlformats.org/drawingml/2006/main" prst="rect">
             <a:avLst/>
@@ -8671,7 +8677,7 @@
           <a:lstStyle xmlns:a="http://schemas.openxmlformats.org/drawingml/2006/main"/>
           <a:p xmlns:a="http://schemas.openxmlformats.org/drawingml/2006/main">
             <a:pPr algn="l">
-              <a:defRPr sz="1500" b="0">
+              <a:defRPr sz="1725" b="0">
                 <a:solidFill>
                   <a:srgbClr val="17253A"/>
                 </a:solidFill>
@@ -8681,7 +8687,7 @@
               </a:defRPr>
             </a:pPr>
             <a:r>
-              <a:rPr sz="1500" b="0">
+              <a:rPr sz="1725" b="0">
                 <a:solidFill>
                   <a:srgbClr val="17253A"/>
                 </a:solidFill>
@@ -8689,7 +8695,7 @@
                 <a:ea typeface="Arial"/>
                 <a:cs typeface="Arial"/>
               </a:rPr>
-              <a:t>Complete the calculation: 17.</a:t>
+              <a:t>Divide by 3</a:t>
             </a:r>
           </a:p>
         </p:txBody>
@@ -8699,28 +8705,30 @@
           <p:cNvPr id="20" name="">
             <a:extLst xmlns:a="http://schemas.openxmlformats.org/drawingml/2006/main">
               <a:ext uri="{FF2B5EF4-FFF2-40B4-BE49-F238E27FC236}">
-                <a16:creationId xmlns:a16="http://schemas.microsoft.com/office/drawing/2014/main" id="{47C5E9AB-450D-4449-A380-3FAD617A7840}"/>
-              </a:ext>
-            </a:extLst>
-          </p:cNvPr>
-          <p:cNvSpPr>
-            <a:spLocks xmlns:a="http://schemas.openxmlformats.org/drawingml/2006/main" noGrp="1"/>
-          </p:cNvSpPr>
-          <p:nvPr/>
-        </p:nvSpPr>
-        <p:spPr>
-          <a:xfrm xmlns:a="http://schemas.openxmlformats.org/drawingml/2006/main">
-            <a:off x="1000125" y="4476750"/>
-            <a:ext cx="476250" cy="476250"/>
-          </a:xfrm>
-          <a:prstGeom xmlns:a="http://schemas.openxmlformats.org/drawingml/2006/main" prst="ellipse">
+                <a16:creationId xmlns:a16="http://schemas.microsoft.com/office/drawing/2014/main" id="{E2EEF1EE-02D5-4B7E-B293-857C099E9F0C}"/>
+              </a:ext>
+            </a:extLst>
+          </p:cNvPr>
+          <p:cNvSpPr>
+            <a:spLocks xmlns:a="http://schemas.openxmlformats.org/drawingml/2006/main" noGrp="1"/>
+          </p:cNvSpPr>
+          <p:nvPr/>
+        </p:nvSpPr>
+        <p:spPr>
+          <a:xfrm xmlns:a="http://schemas.openxmlformats.org/drawingml/2006/main">
+            <a:off x="1714500" y="4695825"/>
+            <a:ext cx="9334500" cy="9525"/>
+          </a:xfrm>
+          <a:prstGeom xmlns:a="http://schemas.openxmlformats.org/drawingml/2006/main" prst="rect">
             <a:avLst/>
           </a:prstGeom>
           <a:solidFill xmlns:a="http://schemas.openxmlformats.org/drawingml/2006/main">
-            <a:srgbClr val="2C6E73"/>
+            <a:srgbClr val="D9E0E6"/>
           </a:solidFill>
           <a:ln xmlns:a="http://schemas.openxmlformats.org/drawingml/2006/main" w="0">
-            <a:noFill/>
+            <a:solidFill>
+              <a:srgbClr val="D9E0E6"/>
+            </a:solidFill>
           </a:ln>
         </p:spPr>
       </p:sp>
@@ -8729,19 +8737,19 @@
           <p:cNvPr id="21" name="">
             <a:extLst xmlns:a="http://schemas.openxmlformats.org/drawingml/2006/main">
               <a:ext uri="{FF2B5EF4-FFF2-40B4-BE49-F238E27FC236}">
-                <a16:creationId xmlns:a16="http://schemas.microsoft.com/office/drawing/2014/main" id="{59887730-4B05-4628-9A6A-2397355EAA95}"/>
-              </a:ext>
-            </a:extLst>
-          </p:cNvPr>
-          <p:cNvSpPr>
-            <a:spLocks xmlns:a="http://schemas.openxmlformats.org/drawingml/2006/main" noGrp="1"/>
-          </p:cNvSpPr>
-          <p:nvPr/>
-        </p:nvSpPr>
-        <p:spPr>
-          <a:xfrm xmlns:a="http://schemas.openxmlformats.org/drawingml/2006/main">
-            <a:off x="1000125" y="4505325"/>
-            <a:ext cx="476250" cy="419100"/>
+                <a16:creationId xmlns:a16="http://schemas.microsoft.com/office/drawing/2014/main" id="{17ECB49E-F0D2-4BCD-9C28-A7FBB646E9A3}"/>
+              </a:ext>
+            </a:extLst>
+          </p:cNvPr>
+          <p:cNvSpPr>
+            <a:spLocks xmlns:a="http://schemas.openxmlformats.org/drawingml/2006/main" noGrp="1"/>
+          </p:cNvSpPr>
+          <p:nvPr/>
+        </p:nvSpPr>
+        <p:spPr>
+          <a:xfrm xmlns:a="http://schemas.openxmlformats.org/drawingml/2006/main">
+            <a:off x="1162050" y="4829175"/>
+            <a:ext cx="400050" cy="400050"/>
           </a:xfrm>
           <a:prstGeom xmlns:a="http://schemas.openxmlformats.org/drawingml/2006/main" prst="rect">
             <a:avLst/>
@@ -8758,9 +8766,9 @@
           <a:lstStyle xmlns:a="http://schemas.openxmlformats.org/drawingml/2006/main"/>
           <a:p xmlns:a="http://schemas.openxmlformats.org/drawingml/2006/main">
             <a:pPr algn="ctr">
-              <a:defRPr sz="1350" b="1">
-                <a:solidFill>
-                  <a:srgbClr val="FFFFFF"/>
+              <a:defRPr sz="1125" b="1">
+                <a:solidFill>
+                  <a:srgbClr val="2F785D"/>
                 </a:solidFill>
                 <a:latin typeface="Arial"/>
                 <a:ea typeface="Arial"/>
@@ -8768,9 +8776,9 @@
               </a:defRPr>
             </a:pPr>
             <a:r>
-              <a:rPr sz="1350" b="1">
-                <a:solidFill>
-                  <a:srgbClr val="FFFFFF"/>
+              <a:rPr sz="1125" b="1">
+                <a:solidFill>
+                  <a:srgbClr val="2F785D"/>
                 </a:solidFill>
                 <a:latin typeface="Arial"/>
                 <a:ea typeface="Arial"/>
@@ -8786,19 +8794,19 @@
           <p:cNvPr id="22" name="">
             <a:extLst xmlns:a="http://schemas.openxmlformats.org/drawingml/2006/main">
               <a:ext uri="{FF2B5EF4-FFF2-40B4-BE49-F238E27FC236}">
-                <a16:creationId xmlns:a16="http://schemas.microsoft.com/office/drawing/2014/main" id="{08B02E87-0746-41B5-A08E-55AF03288D77}"/>
-              </a:ext>
-            </a:extLst>
-          </p:cNvPr>
-          <p:cNvSpPr>
-            <a:spLocks xmlns:a="http://schemas.openxmlformats.org/drawingml/2006/main" noGrp="1"/>
-          </p:cNvSpPr>
-          <p:nvPr/>
-        </p:nvSpPr>
-        <p:spPr>
-          <a:xfrm xmlns:a="http://schemas.openxmlformats.org/drawingml/2006/main">
-            <a:off x="1714500" y="4410075"/>
-            <a:ext cx="9429750" cy="609600"/>
+                <a16:creationId xmlns:a16="http://schemas.microsoft.com/office/drawing/2014/main" id="{3471EC0D-576F-411C-AC73-B31C241B2687}"/>
+              </a:ext>
+            </a:extLst>
+          </p:cNvPr>
+          <p:cNvSpPr>
+            <a:spLocks xmlns:a="http://schemas.openxmlformats.org/drawingml/2006/main" noGrp="1"/>
+          </p:cNvSpPr>
+          <p:nvPr/>
+        </p:nvSpPr>
+        <p:spPr>
+          <a:xfrm xmlns:a="http://schemas.openxmlformats.org/drawingml/2006/main">
+            <a:off x="1714500" y="4743450"/>
+            <a:ext cx="9525000" cy="809625"/>
           </a:xfrm>
           <a:prstGeom xmlns:a="http://schemas.openxmlformats.org/drawingml/2006/main" prst="rect">
             <a:avLst/>
@@ -8815,7 +8823,7 @@
           <a:lstStyle xmlns:a="http://schemas.openxmlformats.org/drawingml/2006/main"/>
           <a:p xmlns:a="http://schemas.openxmlformats.org/drawingml/2006/main">
             <a:pPr algn="l">
-              <a:defRPr sz="1500" b="1">
+              <a:defRPr sz="1725" b="1">
                 <a:solidFill>
                   <a:srgbClr val="2F785D"/>
                 </a:solidFill>
@@ -8825,7 +8833,7 @@
               </a:defRPr>
             </a:pPr>
             <a:r>
-              <a:rPr sz="1500" b="1">
+              <a:rPr sz="1725" b="1">
                 <a:solidFill>
                   <a:srgbClr val="2F785D"/>
                 </a:solidFill>
@@ -8833,7 +8841,7 @@
                 <a:ea typeface="Arial"/>
                 <a:cs typeface="Arial"/>
               </a:rPr>
-              <a:t>Check the result: Substitute the solution to check the original equation.</a:t>
+              <a:t>x = 17</a:t>
             </a:r>
           </a:p>
         </p:txBody>
@@ -8841,7 +8849,7 @@
     </p:spTree>
     <p:extLst>
       <p:ext uri="{BB962C8B-B14F-4D97-AF65-F5344CB8AC3E}">
-        <p14:creationId xmlns:p14="http://schemas.microsoft.com/office/powerpoint/2010/main" val="1444390578"/>
+        <p14:creationId xmlns:p14="http://schemas.microsoft.com/office/powerpoint/2010/main" val="1285272976"/>
       </p:ext>
     </p:extLst>
   </p:cSld>
@@ -9134,7 +9142,7 @@
           <p:cNvPr id="15" name="">
             <a:extLst xmlns:a="http://schemas.openxmlformats.org/drawingml/2006/main">
               <a:ext uri="{FF2B5EF4-FFF2-40B4-BE49-F238E27FC236}">
-                <a16:creationId xmlns:a16="http://schemas.microsoft.com/office/drawing/2014/main" id="{7BDBE77E-5D45-49F7-B152-3A78EA113DD2}"/>
+                <a16:creationId xmlns:a16="http://schemas.microsoft.com/office/drawing/2014/main" id="{9EE51BE5-F0D5-46A5-BE86-ED0B35490A45}"/>
               </a:ext>
             </a:extLst>
           </p:cNvPr>
@@ -9166,7 +9174,7 @@
           <p:cNvPr id="2" name="">
             <a:extLst xmlns:a="http://schemas.openxmlformats.org/drawingml/2006/main">
               <a:ext uri="{FF2B5EF4-FFF2-40B4-BE49-F238E27FC236}">
-                <a16:creationId xmlns:a16="http://schemas.microsoft.com/office/drawing/2014/main" id="{A6C28153-1A5F-441D-8EDA-54CDA9EE18CA}"/>
+                <a16:creationId xmlns:a16="http://schemas.microsoft.com/office/drawing/2014/main" id="{830B9099-C4D1-415D-9101-135AFEEBC3F4}"/>
               </a:ext>
             </a:extLst>
           </p:cNvPr>
@@ -9223,7 +9231,7 @@
           <p:cNvPr id="3" name="">
             <a:extLst xmlns:a="http://schemas.openxmlformats.org/drawingml/2006/main">
               <a:ext uri="{FF2B5EF4-FFF2-40B4-BE49-F238E27FC236}">
-                <a16:creationId xmlns:a16="http://schemas.microsoft.com/office/drawing/2014/main" id="{1E537D18-306A-4FFC-B225-E97F52A94E0E}"/>
+                <a16:creationId xmlns:a16="http://schemas.microsoft.com/office/drawing/2014/main" id="{94BBC3D6-1993-44D8-9BAE-1D386AA50DE5}"/>
               </a:ext>
             </a:extLst>
           </p:cNvPr>
@@ -9255,7 +9263,7 @@
           <p:cNvPr id="4" name="">
             <a:extLst xmlns:a="http://schemas.openxmlformats.org/drawingml/2006/main">
               <a:ext uri="{FF2B5EF4-FFF2-40B4-BE49-F238E27FC236}">
-                <a16:creationId xmlns:a16="http://schemas.microsoft.com/office/drawing/2014/main" id="{DB3846C0-E573-4A1D-9FA7-894791B664DA}"/>
+                <a16:creationId xmlns:a16="http://schemas.microsoft.com/office/drawing/2014/main" id="{5A40D606-9D7A-46BC-8DA2-6C9914C04E0C}"/>
               </a:ext>
             </a:extLst>
           </p:cNvPr>
@@ -9312,7 +9320,7 @@
           <p:cNvPr id="5" name="">
             <a:extLst xmlns:a="http://schemas.openxmlformats.org/drawingml/2006/main">
               <a:ext uri="{FF2B5EF4-FFF2-40B4-BE49-F238E27FC236}">
-                <a16:creationId xmlns:a16="http://schemas.microsoft.com/office/drawing/2014/main" id="{877CC779-F07F-4894-A7CB-3FD32A3C3A01}"/>
+                <a16:creationId xmlns:a16="http://schemas.microsoft.com/office/drawing/2014/main" id="{42041FEC-DB89-41ED-8420-089031F7AE4B}"/>
               </a:ext>
             </a:extLst>
           </p:cNvPr>
@@ -9369,7 +9377,7 @@
           <p:cNvPr id="6" name="">
             <a:extLst xmlns:a="http://schemas.openxmlformats.org/drawingml/2006/main">
               <a:ext uri="{FF2B5EF4-FFF2-40B4-BE49-F238E27FC236}">
-                <a16:creationId xmlns:a16="http://schemas.microsoft.com/office/drawing/2014/main" id="{94EFEC54-7F7E-4C9B-A027-7CADCD1DC075}"/>
+                <a16:creationId xmlns:a16="http://schemas.microsoft.com/office/drawing/2014/main" id="{92BA16E3-7059-4B75-B9E3-0B328D848A27}"/>
               </a:ext>
             </a:extLst>
           </p:cNvPr>
@@ -9426,7 +9434,7 @@
           <p:cNvPr id="7" name="">
             <a:extLst xmlns:a="http://schemas.openxmlformats.org/drawingml/2006/main">
               <a:ext uri="{FF2B5EF4-FFF2-40B4-BE49-F238E27FC236}">
-                <a16:creationId xmlns:a16="http://schemas.microsoft.com/office/drawing/2014/main" id="{A9BE8F3D-6FC9-459E-83EB-72D1342345E0}"/>
+                <a16:creationId xmlns:a16="http://schemas.microsoft.com/office/drawing/2014/main" id="{16E5030A-8414-4D9D-AFCC-65B63D7B300B}"/>
               </a:ext>
             </a:extLst>
           </p:cNvPr>
@@ -9458,7 +9466,7 @@
           <p:cNvPr id="8" name="">
             <a:extLst xmlns:a="http://schemas.openxmlformats.org/drawingml/2006/main">
               <a:ext uri="{FF2B5EF4-FFF2-40B4-BE49-F238E27FC236}">
-                <a16:creationId xmlns:a16="http://schemas.microsoft.com/office/drawing/2014/main" id="{A8761356-E466-452F-B746-19709A62F3F9}"/>
+                <a16:creationId xmlns:a16="http://schemas.microsoft.com/office/drawing/2014/main" id="{8058E802-9C15-4F8C-B253-B88B686765C4}"/>
               </a:ext>
             </a:extLst>
           </p:cNvPr>
@@ -9515,7 +9523,7 @@
           <p:cNvPr id="9" name="">
             <a:extLst xmlns:a="http://schemas.openxmlformats.org/drawingml/2006/main">
               <a:ext uri="{FF2B5EF4-FFF2-40B4-BE49-F238E27FC236}">
-                <a16:creationId xmlns:a16="http://schemas.microsoft.com/office/drawing/2014/main" id="{C6D53A8B-2FFD-4545-87E9-05A298374245}"/>
+                <a16:creationId xmlns:a16="http://schemas.microsoft.com/office/drawing/2014/main" id="{63594868-5381-4D07-96AB-684B8E871329}"/>
               </a:ext>
             </a:extLst>
           </p:cNvPr>
@@ -9572,7 +9580,7 @@
           <p:cNvPr id="10" name="">
             <a:extLst xmlns:a="http://schemas.openxmlformats.org/drawingml/2006/main">
               <a:ext uri="{FF2B5EF4-FFF2-40B4-BE49-F238E27FC236}">
-                <a16:creationId xmlns:a16="http://schemas.microsoft.com/office/drawing/2014/main" id="{B1269810-D191-4D3D-B76F-11DF6C184C84}"/>
+                <a16:creationId xmlns:a16="http://schemas.microsoft.com/office/drawing/2014/main" id="{7A24821E-DCEE-4ED6-B9D5-E59E7EF093E6}"/>
               </a:ext>
             </a:extLst>
           </p:cNvPr>
@@ -9629,7 +9637,7 @@
           <p:cNvPr id="11" name="">
             <a:extLst xmlns:a="http://schemas.openxmlformats.org/drawingml/2006/main">
               <a:ext uri="{FF2B5EF4-FFF2-40B4-BE49-F238E27FC236}">
-                <a16:creationId xmlns:a16="http://schemas.microsoft.com/office/drawing/2014/main" id="{8685F33E-EBF4-4551-98EA-216206730668}"/>
+                <a16:creationId xmlns:a16="http://schemas.microsoft.com/office/drawing/2014/main" id="{325D9B46-1AB4-4EC9-B866-B17C55565892}"/>
               </a:ext>
             </a:extLst>
           </p:cNvPr>
@@ -9686,7 +9694,7 @@
           <p:cNvPr id="12" name="">
             <a:extLst xmlns:a="http://schemas.openxmlformats.org/drawingml/2006/main">
               <a:ext uri="{FF2B5EF4-FFF2-40B4-BE49-F238E27FC236}">
-                <a16:creationId xmlns:a16="http://schemas.microsoft.com/office/drawing/2014/main" id="{553B159C-5BB4-4373-BE6D-4196E59FE9DD}"/>
+                <a16:creationId xmlns:a16="http://schemas.microsoft.com/office/drawing/2014/main" id="{A7BA3ED1-F443-463E-9705-14165B6AFA4D}"/>
               </a:ext>
             </a:extLst>
           </p:cNvPr>
@@ -9718,7 +9726,7 @@
           <p:cNvPr id="13" name="">
             <a:extLst xmlns:a="http://schemas.openxmlformats.org/drawingml/2006/main">
               <a:ext uri="{FF2B5EF4-FFF2-40B4-BE49-F238E27FC236}">
-                <a16:creationId xmlns:a16="http://schemas.microsoft.com/office/drawing/2014/main" id="{02071514-AC0B-40B3-84FE-7DB283334699}"/>
+                <a16:creationId xmlns:a16="http://schemas.microsoft.com/office/drawing/2014/main" id="{EFCD12BD-AEF7-4E6D-A80D-5A40101033F3}"/>
               </a:ext>
             </a:extLst>
           </p:cNvPr>
@@ -9775,7 +9783,7 @@
           <p:cNvPr id="14" name="">
             <a:extLst xmlns:a="http://schemas.openxmlformats.org/drawingml/2006/main">
               <a:ext uri="{FF2B5EF4-FFF2-40B4-BE49-F238E27FC236}">
-                <a16:creationId xmlns:a16="http://schemas.microsoft.com/office/drawing/2014/main" id="{4289C499-EA21-4076-9254-4DC72E7D408C}"/>
+                <a16:creationId xmlns:a16="http://schemas.microsoft.com/office/drawing/2014/main" id="{B0FE7E92-BAE9-4F8A-BE00-0E520066D736}"/>
               </a:ext>
             </a:extLst>
           </p:cNvPr>
@@ -9830,7 +9838,7 @@
     </p:spTree>
     <p:extLst>
       <p:ext uri="{BB962C8B-B14F-4D97-AF65-F5344CB8AC3E}">
-        <p14:creationId xmlns:p14="http://schemas.microsoft.com/office/powerpoint/2010/main" val="703744683"/>
+        <p14:creationId xmlns:p14="http://schemas.microsoft.com/office/powerpoint/2010/main" val="1177118314"/>
       </p:ext>
     </p:extLst>
   </p:cSld>
@@ -10031,7 +10039,7 @@
           <p:cNvPr id="16" name="">
             <a:extLst xmlns:a="http://schemas.openxmlformats.org/drawingml/2006/main">
               <a:ext uri="{FF2B5EF4-FFF2-40B4-BE49-F238E27FC236}">
-                <a16:creationId xmlns:a16="http://schemas.microsoft.com/office/drawing/2014/main" id="{252FDAE3-3CEC-47EA-83AF-7851E566D3CE}"/>
+                <a16:creationId xmlns:a16="http://schemas.microsoft.com/office/drawing/2014/main" id="{0526C66A-D92B-460D-B7BB-986EDACAE09F}"/>
               </a:ext>
             </a:extLst>
           </p:cNvPr>
@@ -10063,7 +10071,7 @@
           <p:cNvPr id="2" name="">
             <a:extLst xmlns:a="http://schemas.openxmlformats.org/drawingml/2006/main">
               <a:ext uri="{FF2B5EF4-FFF2-40B4-BE49-F238E27FC236}">
-                <a16:creationId xmlns:a16="http://schemas.microsoft.com/office/drawing/2014/main" id="{89E8746B-7D94-40E1-9632-D72E23D90FF4}"/>
+                <a16:creationId xmlns:a16="http://schemas.microsoft.com/office/drawing/2014/main" id="{C7389EC6-A8DE-4563-96F4-BC05555ACFD5}"/>
               </a:ext>
             </a:extLst>
           </p:cNvPr>
@@ -10120,7 +10128,7 @@
           <p:cNvPr id="3" name="">
             <a:extLst xmlns:a="http://schemas.openxmlformats.org/drawingml/2006/main">
               <a:ext uri="{FF2B5EF4-FFF2-40B4-BE49-F238E27FC236}">
-                <a16:creationId xmlns:a16="http://schemas.microsoft.com/office/drawing/2014/main" id="{D650E1B6-5046-4C35-BD57-416624D04CAF}"/>
+                <a16:creationId xmlns:a16="http://schemas.microsoft.com/office/drawing/2014/main" id="{382A98C6-56B4-4712-9F94-07BF3D08E232}"/>
               </a:ext>
             </a:extLst>
           </p:cNvPr>
@@ -10152,7 +10160,7 @@
           <p:cNvPr id="4" name="">
             <a:extLst xmlns:a="http://schemas.openxmlformats.org/drawingml/2006/main">
               <a:ext uri="{FF2B5EF4-FFF2-40B4-BE49-F238E27FC236}">
-                <a16:creationId xmlns:a16="http://schemas.microsoft.com/office/drawing/2014/main" id="{132F2B5D-9B32-4E06-8239-2261A5D50D1E}"/>
+                <a16:creationId xmlns:a16="http://schemas.microsoft.com/office/drawing/2014/main" id="{F16D8316-1FBC-4B20-986F-DB73AABEEF23}"/>
               </a:ext>
             </a:extLst>
           </p:cNvPr>
@@ -10209,7 +10217,7 @@
           <p:cNvPr id="5" name="">
             <a:extLst xmlns:a="http://schemas.openxmlformats.org/drawingml/2006/main">
               <a:ext uri="{FF2B5EF4-FFF2-40B4-BE49-F238E27FC236}">
-                <a16:creationId xmlns:a16="http://schemas.microsoft.com/office/drawing/2014/main" id="{95C351D4-2AA6-4EC7-8301-EB19FA6A60EC}"/>
+                <a16:creationId xmlns:a16="http://schemas.microsoft.com/office/drawing/2014/main" id="{FB765ED4-DEF9-4C81-8463-F6F78946B772}"/>
               </a:ext>
             </a:extLst>
           </p:cNvPr>
@@ -10266,7 +10274,7 @@
           <p:cNvPr id="6" name="">
             <a:extLst xmlns:a="http://schemas.openxmlformats.org/drawingml/2006/main">
               <a:ext uri="{FF2B5EF4-FFF2-40B4-BE49-F238E27FC236}">
-                <a16:creationId xmlns:a16="http://schemas.microsoft.com/office/drawing/2014/main" id="{E5A3527A-0561-422A-AD84-E247E0986DA6}"/>
+                <a16:creationId xmlns:a16="http://schemas.microsoft.com/office/drawing/2014/main" id="{1EBAB8C5-C926-4F8E-BC07-6499A7EE89C0}"/>
               </a:ext>
             </a:extLst>
           </p:cNvPr>
@@ -10323,7 +10331,7 @@
           <p:cNvPr id="7" name="">
             <a:extLst xmlns:a="http://schemas.openxmlformats.org/drawingml/2006/main">
               <a:ext uri="{FF2B5EF4-FFF2-40B4-BE49-F238E27FC236}">
-                <a16:creationId xmlns:a16="http://schemas.microsoft.com/office/drawing/2014/main" id="{81BBD793-65D4-4283-BBA4-6919F485F87E}"/>
+                <a16:creationId xmlns:a16="http://schemas.microsoft.com/office/drawing/2014/main" id="{8CCFAFBD-5505-4400-A651-322DA1A3F581}"/>
               </a:ext>
             </a:extLst>
           </p:cNvPr>
@@ -10355,7 +10363,7 @@
           <p:cNvPr id="8" name="">
             <a:extLst xmlns:a="http://schemas.openxmlformats.org/drawingml/2006/main">
               <a:ext uri="{FF2B5EF4-FFF2-40B4-BE49-F238E27FC236}">
-                <a16:creationId xmlns:a16="http://schemas.microsoft.com/office/drawing/2014/main" id="{0E14DDC1-E34B-4BBC-A38E-ED1526D4851C}"/>
+                <a16:creationId xmlns:a16="http://schemas.microsoft.com/office/drawing/2014/main" id="{C8F6F718-AC9B-4C8F-8CCA-0C5D5C2E7487}"/>
               </a:ext>
             </a:extLst>
           </p:cNvPr>
@@ -10412,7 +10420,7 @@
           <p:cNvPr id="9" name="">
             <a:extLst xmlns:a="http://schemas.openxmlformats.org/drawingml/2006/main">
               <a:ext uri="{FF2B5EF4-FFF2-40B4-BE49-F238E27FC236}">
-                <a16:creationId xmlns:a16="http://schemas.microsoft.com/office/drawing/2014/main" id="{AD56D8C7-E45C-47BD-9CC3-9C54FF4FA56C}"/>
+                <a16:creationId xmlns:a16="http://schemas.microsoft.com/office/drawing/2014/main" id="{DD259D4A-5301-46DF-A001-E61027CB4559}"/>
               </a:ext>
             </a:extLst>
           </p:cNvPr>
@@ -10469,7 +10477,7 @@
           <p:cNvPr id="10" name="">
             <a:extLst xmlns:a="http://schemas.openxmlformats.org/drawingml/2006/main">
               <a:ext uri="{FF2B5EF4-FFF2-40B4-BE49-F238E27FC236}">
-                <a16:creationId xmlns:a16="http://schemas.microsoft.com/office/drawing/2014/main" id="{716D1347-4EB3-4261-A228-EC01ECD76A97}"/>
+                <a16:creationId xmlns:a16="http://schemas.microsoft.com/office/drawing/2014/main" id="{D1339996-817F-4D6D-B33C-5133039F986B}"/>
               </a:ext>
             </a:extLst>
           </p:cNvPr>
@@ -10526,7 +10534,7 @@
           <p:cNvPr id="11" name="">
             <a:extLst xmlns:a="http://schemas.openxmlformats.org/drawingml/2006/main">
               <a:ext uri="{FF2B5EF4-FFF2-40B4-BE49-F238E27FC236}">
-                <a16:creationId xmlns:a16="http://schemas.microsoft.com/office/drawing/2014/main" id="{18963C07-5F2A-4728-90CA-ACAE88445F1C}"/>
+                <a16:creationId xmlns:a16="http://schemas.microsoft.com/office/drawing/2014/main" id="{7184B3AD-89B6-4EA3-99C1-7A93AC12C7C3}"/>
               </a:ext>
             </a:extLst>
           </p:cNvPr>
@@ -10583,7 +10591,7 @@
           <p:cNvPr id="12" name="">
             <a:extLst xmlns:a="http://schemas.openxmlformats.org/drawingml/2006/main">
               <a:ext uri="{FF2B5EF4-FFF2-40B4-BE49-F238E27FC236}">
-                <a16:creationId xmlns:a16="http://schemas.microsoft.com/office/drawing/2014/main" id="{2AF0C2A3-78F4-47C7-852B-FB9701E7F863}"/>
+                <a16:creationId xmlns:a16="http://schemas.microsoft.com/office/drawing/2014/main" id="{831748C0-ADBD-4EAC-8CD0-45342855F9D1}"/>
               </a:ext>
             </a:extLst>
           </p:cNvPr>
@@ -10640,7 +10648,7 @@
           <p:cNvPr id="13" name="">
             <a:extLst xmlns:a="http://schemas.openxmlformats.org/drawingml/2006/main">
               <a:ext uri="{FF2B5EF4-FFF2-40B4-BE49-F238E27FC236}">
-                <a16:creationId xmlns:a16="http://schemas.microsoft.com/office/drawing/2014/main" id="{B5EAE7F1-AF96-4747-BC75-8CBD8DC3833B}"/>
+                <a16:creationId xmlns:a16="http://schemas.microsoft.com/office/drawing/2014/main" id="{FFDD1664-4323-4692-BC3A-951ECFF354B2}"/>
               </a:ext>
             </a:extLst>
           </p:cNvPr>
@@ -10697,7 +10705,7 @@
           <p:cNvPr id="14" name="">
             <a:extLst xmlns:a="http://schemas.openxmlformats.org/drawingml/2006/main">
               <a:ext uri="{FF2B5EF4-FFF2-40B4-BE49-F238E27FC236}">
-                <a16:creationId xmlns:a16="http://schemas.microsoft.com/office/drawing/2014/main" id="{BE795222-78DC-4619-A5A0-44DDF24943B8}"/>
+                <a16:creationId xmlns:a16="http://schemas.microsoft.com/office/drawing/2014/main" id="{7FE18A08-7E84-4125-99C9-86B50960E378}"/>
               </a:ext>
             </a:extLst>
           </p:cNvPr>
@@ -10754,7 +10762,7 @@
           <p:cNvPr id="15" name="">
             <a:extLst xmlns:a="http://schemas.openxmlformats.org/drawingml/2006/main">
               <a:ext uri="{FF2B5EF4-FFF2-40B4-BE49-F238E27FC236}">
-                <a16:creationId xmlns:a16="http://schemas.microsoft.com/office/drawing/2014/main" id="{4CB96ED4-3CF2-4847-AC6A-3DA39C7AE356}"/>
+                <a16:creationId xmlns:a16="http://schemas.microsoft.com/office/drawing/2014/main" id="{3F19DB6B-65A9-42AB-9CA1-6AA88BC90E23}"/>
               </a:ext>
             </a:extLst>
           </p:cNvPr>
@@ -10809,7 +10817,7 @@
     </p:spTree>
     <p:extLst>
       <p:ext uri="{BB962C8B-B14F-4D97-AF65-F5344CB8AC3E}">
-        <p14:creationId xmlns:p14="http://schemas.microsoft.com/office/powerpoint/2010/main" val="368451027"/>
+        <p14:creationId xmlns:p14="http://schemas.microsoft.com/office/powerpoint/2010/main" val="1551948715"/>
       </p:ext>
     </p:extLst>
   </p:cSld>
@@ -10964,7 +10972,7 @@
           <p:cNvPr id="16" name="">
             <a:extLst xmlns:a="http://schemas.openxmlformats.org/drawingml/2006/main">
               <a:ext uri="{FF2B5EF4-FFF2-40B4-BE49-F238E27FC236}">
-                <a16:creationId xmlns:a16="http://schemas.microsoft.com/office/drawing/2014/main" id="{574D5423-DA57-46C7-A515-B01A949C14BB}"/>
+                <a16:creationId xmlns:a16="http://schemas.microsoft.com/office/drawing/2014/main" id="{EFC34E9E-C99D-4D42-A102-73CDC4F5EF97}"/>
               </a:ext>
             </a:extLst>
           </p:cNvPr>
@@ -10996,7 +11004,7 @@
           <p:cNvPr id="2" name="">
             <a:extLst xmlns:a="http://schemas.openxmlformats.org/drawingml/2006/main">
               <a:ext uri="{FF2B5EF4-FFF2-40B4-BE49-F238E27FC236}">
-                <a16:creationId xmlns:a16="http://schemas.microsoft.com/office/drawing/2014/main" id="{3DACD553-A26D-448B-9154-F22958C99A47}"/>
+                <a16:creationId xmlns:a16="http://schemas.microsoft.com/office/drawing/2014/main" id="{0A68C603-8EE4-485D-A6B9-F523B15BE9A6}"/>
               </a:ext>
             </a:extLst>
           </p:cNvPr>
@@ -11053,7 +11061,7 @@
           <p:cNvPr id="3" name="">
             <a:extLst xmlns:a="http://schemas.openxmlformats.org/drawingml/2006/main">
               <a:ext uri="{FF2B5EF4-FFF2-40B4-BE49-F238E27FC236}">
-                <a16:creationId xmlns:a16="http://schemas.microsoft.com/office/drawing/2014/main" id="{07306B43-BC95-47F1-ADDA-8CAA17E83591}"/>
+                <a16:creationId xmlns:a16="http://schemas.microsoft.com/office/drawing/2014/main" id="{70DD39BE-32BF-44C1-A582-7F73CD17DD72}"/>
               </a:ext>
             </a:extLst>
           </p:cNvPr>
@@ -11085,7 +11093,7 @@
           <p:cNvPr id="4" name="">
             <a:extLst xmlns:a="http://schemas.openxmlformats.org/drawingml/2006/main">
               <a:ext uri="{FF2B5EF4-FFF2-40B4-BE49-F238E27FC236}">
-                <a16:creationId xmlns:a16="http://schemas.microsoft.com/office/drawing/2014/main" id="{9FA72A99-77E2-4219-BE3F-FAD208DD60DD}"/>
+                <a16:creationId xmlns:a16="http://schemas.microsoft.com/office/drawing/2014/main" id="{99F6C0C9-6F70-4383-866C-B7BA0312B39F}"/>
               </a:ext>
             </a:extLst>
           </p:cNvPr>
@@ -11142,7 +11150,7 @@
           <p:cNvPr id="5" name="">
             <a:extLst xmlns:a="http://schemas.openxmlformats.org/drawingml/2006/main">
               <a:ext uri="{FF2B5EF4-FFF2-40B4-BE49-F238E27FC236}">
-                <a16:creationId xmlns:a16="http://schemas.microsoft.com/office/drawing/2014/main" id="{57745B48-6A87-4B7C-AE44-53EAEDF23E3B}"/>
+                <a16:creationId xmlns:a16="http://schemas.microsoft.com/office/drawing/2014/main" id="{E1386A50-EF95-49C3-95B7-16BAB2453DE5}"/>
               </a:ext>
             </a:extLst>
           </p:cNvPr>
@@ -11199,7 +11207,7 @@
           <p:cNvPr id="6" name="">
             <a:extLst xmlns:a="http://schemas.openxmlformats.org/drawingml/2006/main">
               <a:ext uri="{FF2B5EF4-FFF2-40B4-BE49-F238E27FC236}">
-                <a16:creationId xmlns:a16="http://schemas.microsoft.com/office/drawing/2014/main" id="{AD4AB100-C819-4A58-A507-CA8513B49964}"/>
+                <a16:creationId xmlns:a16="http://schemas.microsoft.com/office/drawing/2014/main" id="{DAA38BBC-9EBF-4AD7-9216-4F8BD00B894B}"/>
               </a:ext>
             </a:extLst>
           </p:cNvPr>
@@ -11256,7 +11264,7 @@
           <p:cNvPr id="7" name="">
             <a:extLst xmlns:a="http://schemas.openxmlformats.org/drawingml/2006/main">
               <a:ext uri="{FF2B5EF4-FFF2-40B4-BE49-F238E27FC236}">
-                <a16:creationId xmlns:a16="http://schemas.microsoft.com/office/drawing/2014/main" id="{60A4739C-AB02-4E32-9F42-736E4AFDE4F9}"/>
+                <a16:creationId xmlns:a16="http://schemas.microsoft.com/office/drawing/2014/main" id="{C7D8C9A1-8E9A-4690-B078-0BE20EA1E8F8}"/>
               </a:ext>
             </a:extLst>
           </p:cNvPr>
@@ -11288,7 +11296,7 @@
           <p:cNvPr id="8" name="">
             <a:extLst xmlns:a="http://schemas.openxmlformats.org/drawingml/2006/main">
               <a:ext uri="{FF2B5EF4-FFF2-40B4-BE49-F238E27FC236}">
-                <a16:creationId xmlns:a16="http://schemas.microsoft.com/office/drawing/2014/main" id="{8C19A8D4-C880-4393-B07C-AA30B47E0033}"/>
+                <a16:creationId xmlns:a16="http://schemas.microsoft.com/office/drawing/2014/main" id="{6C770210-B3BA-43C1-BC9A-8AD8386EA52D}"/>
               </a:ext>
             </a:extLst>
           </p:cNvPr>
@@ -11345,7 +11353,7 @@
           <p:cNvPr id="9" name="">
             <a:extLst xmlns:a="http://schemas.openxmlformats.org/drawingml/2006/main">
               <a:ext uri="{FF2B5EF4-FFF2-40B4-BE49-F238E27FC236}">
-                <a16:creationId xmlns:a16="http://schemas.microsoft.com/office/drawing/2014/main" id="{3CF2A4E2-1638-410F-BC36-D1FB7490A78C}"/>
+                <a16:creationId xmlns:a16="http://schemas.microsoft.com/office/drawing/2014/main" id="{262D831A-79F7-411C-87CB-3740DE187BBF}"/>
               </a:ext>
             </a:extLst>
           </p:cNvPr>
@@ -11406,7 +11414,7 @@
           <p:nvPr/>
         </p:nvPicPr>
         <p:blipFill>
-          <a:blip xmlns:r="http://schemas.openxmlformats.org/officeDocument/2006/relationships" xmlns:a="http://schemas.openxmlformats.org/drawingml/2006/main" r:embed="R8c78309ecebf4296"/>
+          <a:blip xmlns:r="http://schemas.openxmlformats.org/officeDocument/2006/relationships" xmlns:a="http://schemas.openxmlformats.org/drawingml/2006/main" r:embed="Ra75776bef46d42a8"/>
           <a:stretch xmlns:a="http://schemas.openxmlformats.org/drawingml/2006/main"/>
         </p:blipFill>
         <p:spPr>
@@ -11424,7 +11432,7 @@
           <p:cNvPr id="11" name="">
             <a:extLst xmlns:a="http://schemas.openxmlformats.org/drawingml/2006/main">
               <a:ext uri="{FF2B5EF4-FFF2-40B4-BE49-F238E27FC236}">
-                <a16:creationId xmlns:a16="http://schemas.microsoft.com/office/drawing/2014/main" id="{8CADA316-58DA-4006-8D40-D84BDADEFCAF}"/>
+                <a16:creationId xmlns:a16="http://schemas.microsoft.com/office/drawing/2014/main" id="{A0DA52B9-1729-4310-B2B1-83212B41EB1A}"/>
               </a:ext>
             </a:extLst>
           </p:cNvPr>
@@ -11481,7 +11489,7 @@
           <p:cNvPr id="12" name="">
             <a:extLst xmlns:a="http://schemas.openxmlformats.org/drawingml/2006/main">
               <a:ext uri="{FF2B5EF4-FFF2-40B4-BE49-F238E27FC236}">
-                <a16:creationId xmlns:a16="http://schemas.microsoft.com/office/drawing/2014/main" id="{FEA8638E-0ED8-489A-8138-AD250DDDCAD2}"/>
+                <a16:creationId xmlns:a16="http://schemas.microsoft.com/office/drawing/2014/main" id="{9C6F1718-5F89-4DDA-A8FE-D34210773E80}"/>
               </a:ext>
             </a:extLst>
           </p:cNvPr>
@@ -11538,7 +11546,7 @@
           <p:cNvPr id="13" name="">
             <a:extLst xmlns:a="http://schemas.openxmlformats.org/drawingml/2006/main">
               <a:ext uri="{FF2B5EF4-FFF2-40B4-BE49-F238E27FC236}">
-                <a16:creationId xmlns:a16="http://schemas.microsoft.com/office/drawing/2014/main" id="{C4C25846-9E09-49A6-B00F-34D494F2BC18}"/>
+                <a16:creationId xmlns:a16="http://schemas.microsoft.com/office/drawing/2014/main" id="{F168E82B-5B4F-432C-82CC-02CF16F7F2C6}"/>
               </a:ext>
             </a:extLst>
           </p:cNvPr>
@@ -11570,7 +11578,7 @@
           <p:cNvPr id="14" name="">
             <a:extLst xmlns:a="http://schemas.openxmlformats.org/drawingml/2006/main">
               <a:ext uri="{FF2B5EF4-FFF2-40B4-BE49-F238E27FC236}">
-                <a16:creationId xmlns:a16="http://schemas.microsoft.com/office/drawing/2014/main" id="{27342093-65D9-4BA3-8D55-5EF342268D87}"/>
+                <a16:creationId xmlns:a16="http://schemas.microsoft.com/office/drawing/2014/main" id="{94F15C81-F080-422E-AC6D-5B43B7B542D1}"/>
               </a:ext>
             </a:extLst>
           </p:cNvPr>
@@ -11627,7 +11635,7 @@
           <p:cNvPr id="15" name="">
             <a:extLst xmlns:a="http://schemas.openxmlformats.org/drawingml/2006/main">
               <a:ext uri="{FF2B5EF4-FFF2-40B4-BE49-F238E27FC236}">
-                <a16:creationId xmlns:a16="http://schemas.microsoft.com/office/drawing/2014/main" id="{4B8C0D20-E7E8-4A4E-97B9-28182E5C707F}"/>
+                <a16:creationId xmlns:a16="http://schemas.microsoft.com/office/drawing/2014/main" id="{E9575063-4A60-4671-A161-EEF4E6E9AE53}"/>
               </a:ext>
             </a:extLst>
           </p:cNvPr>
@@ -11682,7 +11690,7 @@
     </p:spTree>
     <p:extLst>
       <p:ext uri="{BB962C8B-B14F-4D97-AF65-F5344CB8AC3E}">
-        <p14:creationId xmlns:p14="http://schemas.microsoft.com/office/powerpoint/2010/main" val="1105064955"/>
+        <p14:creationId xmlns:p14="http://schemas.microsoft.com/office/powerpoint/2010/main" val="1963895774"/>
       </p:ext>
     </p:extLst>
   </p:cSld>
@@ -11837,7 +11845,7 @@
           <p:cNvPr id="23" name="">
             <a:extLst xmlns:a="http://schemas.openxmlformats.org/drawingml/2006/main">
               <a:ext uri="{FF2B5EF4-FFF2-40B4-BE49-F238E27FC236}">
-                <a16:creationId xmlns:a16="http://schemas.microsoft.com/office/drawing/2014/main" id="{2A1264B7-A71E-46C4-A629-6CB29C361265}"/>
+                <a16:creationId xmlns:a16="http://schemas.microsoft.com/office/drawing/2014/main" id="{D6EC0C07-00E1-48FD-9CDA-5F043C14D751}"/>
               </a:ext>
             </a:extLst>
           </p:cNvPr>
@@ -11869,7 +11877,7 @@
           <p:cNvPr id="2" name="">
             <a:extLst xmlns:a="http://schemas.openxmlformats.org/drawingml/2006/main">
               <a:ext uri="{FF2B5EF4-FFF2-40B4-BE49-F238E27FC236}">
-                <a16:creationId xmlns:a16="http://schemas.microsoft.com/office/drawing/2014/main" id="{8C52BF66-F4A5-484C-910D-B5C70285C4B9}"/>
+                <a16:creationId xmlns:a16="http://schemas.microsoft.com/office/drawing/2014/main" id="{ECA1B353-F663-4257-9E96-C276511B1696}"/>
               </a:ext>
             </a:extLst>
           </p:cNvPr>
@@ -11926,7 +11934,7 @@
           <p:cNvPr id="3" name="">
             <a:extLst xmlns:a="http://schemas.openxmlformats.org/drawingml/2006/main">
               <a:ext uri="{FF2B5EF4-FFF2-40B4-BE49-F238E27FC236}">
-                <a16:creationId xmlns:a16="http://schemas.microsoft.com/office/drawing/2014/main" id="{D480AE7C-BE4A-4D1D-A7B1-1F2E689F2B38}"/>
+                <a16:creationId xmlns:a16="http://schemas.microsoft.com/office/drawing/2014/main" id="{05CD327D-235E-43D8-A91F-FE007D381D52}"/>
               </a:ext>
             </a:extLst>
           </p:cNvPr>
@@ -11958,7 +11966,7 @@
           <p:cNvPr id="4" name="">
             <a:extLst xmlns:a="http://schemas.openxmlformats.org/drawingml/2006/main">
               <a:ext uri="{FF2B5EF4-FFF2-40B4-BE49-F238E27FC236}">
-                <a16:creationId xmlns:a16="http://schemas.microsoft.com/office/drawing/2014/main" id="{324D4F05-5A51-4872-8465-31A6A71C719F}"/>
+                <a16:creationId xmlns:a16="http://schemas.microsoft.com/office/drawing/2014/main" id="{6EF368EF-ED6C-4F66-8986-451B42895B95}"/>
               </a:ext>
             </a:extLst>
           </p:cNvPr>
@@ -12015,7 +12023,7 @@
           <p:cNvPr id="5" name="">
             <a:extLst xmlns:a="http://schemas.openxmlformats.org/drawingml/2006/main">
               <a:ext uri="{FF2B5EF4-FFF2-40B4-BE49-F238E27FC236}">
-                <a16:creationId xmlns:a16="http://schemas.microsoft.com/office/drawing/2014/main" id="{B9814784-5CC5-450C-873C-C2089801BF75}"/>
+                <a16:creationId xmlns:a16="http://schemas.microsoft.com/office/drawing/2014/main" id="{6192F31F-9E83-43DD-A38C-2DCA1E7B9394}"/>
               </a:ext>
             </a:extLst>
           </p:cNvPr>
@@ -12072,7 +12080,7 @@
           <p:cNvPr id="6" name="">
             <a:extLst xmlns:a="http://schemas.openxmlformats.org/drawingml/2006/main">
               <a:ext uri="{FF2B5EF4-FFF2-40B4-BE49-F238E27FC236}">
-                <a16:creationId xmlns:a16="http://schemas.microsoft.com/office/drawing/2014/main" id="{B65F6071-D1CE-4304-8468-F1A2859A7B9F}"/>
+                <a16:creationId xmlns:a16="http://schemas.microsoft.com/office/drawing/2014/main" id="{682AC45A-970B-4840-940F-3FF0DF0289AE}"/>
               </a:ext>
             </a:extLst>
           </p:cNvPr>
@@ -12129,7 +12137,7 @@
           <p:cNvPr id="7" name="">
             <a:extLst xmlns:a="http://schemas.openxmlformats.org/drawingml/2006/main">
               <a:ext uri="{FF2B5EF4-FFF2-40B4-BE49-F238E27FC236}">
-                <a16:creationId xmlns:a16="http://schemas.microsoft.com/office/drawing/2014/main" id="{FD18B427-931B-4DF8-A104-0042A4D957C9}"/>
+                <a16:creationId xmlns:a16="http://schemas.microsoft.com/office/drawing/2014/main" id="{C261CCCB-5461-44B2-A878-CFA7D4F286AE}"/>
               </a:ext>
             </a:extLst>
           </p:cNvPr>
@@ -12161,7 +12169,7 @@
           <p:cNvPr id="8" name="">
             <a:extLst xmlns:a="http://schemas.openxmlformats.org/drawingml/2006/main">
               <a:ext uri="{FF2B5EF4-FFF2-40B4-BE49-F238E27FC236}">
-                <a16:creationId xmlns:a16="http://schemas.microsoft.com/office/drawing/2014/main" id="{08F5E181-F7AC-4522-B268-A24693E0DA39}"/>
+                <a16:creationId xmlns:a16="http://schemas.microsoft.com/office/drawing/2014/main" id="{D5765523-BD3D-418F-B9E7-549FED1D2B15}"/>
               </a:ext>
             </a:extLst>
           </p:cNvPr>
@@ -12218,7 +12226,7 @@
           <p:cNvPr id="9" name="">
             <a:extLst xmlns:a="http://schemas.openxmlformats.org/drawingml/2006/main">
               <a:ext uri="{FF2B5EF4-FFF2-40B4-BE49-F238E27FC236}">
-                <a16:creationId xmlns:a16="http://schemas.microsoft.com/office/drawing/2014/main" id="{0BBD9B14-ED2E-4A4D-880D-C14824F03FE5}"/>
+                <a16:creationId xmlns:a16="http://schemas.microsoft.com/office/drawing/2014/main" id="{5A168FF7-D90C-4CBD-8400-6BC1D9831F32}"/>
               </a:ext>
             </a:extLst>
           </p:cNvPr>
@@ -12275,7 +12283,7 @@
           <p:cNvPr id="10" name="">
             <a:extLst xmlns:a="http://schemas.openxmlformats.org/drawingml/2006/main">
               <a:ext uri="{FF2B5EF4-FFF2-40B4-BE49-F238E27FC236}">
-                <a16:creationId xmlns:a16="http://schemas.microsoft.com/office/drawing/2014/main" id="{5708D749-DBEC-4FCB-B483-0E2B31453007}"/>
+                <a16:creationId xmlns:a16="http://schemas.microsoft.com/office/drawing/2014/main" id="{86A36472-F84D-404B-825F-3E97E48E944E}"/>
               </a:ext>
             </a:extLst>
           </p:cNvPr>
@@ -12309,7 +12317,7 @@
           <p:cNvPr id="11" name="">
             <a:extLst xmlns:a="http://schemas.openxmlformats.org/drawingml/2006/main">
               <a:ext uri="{FF2B5EF4-FFF2-40B4-BE49-F238E27FC236}">
-                <a16:creationId xmlns:a16="http://schemas.microsoft.com/office/drawing/2014/main" id="{C174A4DB-CF09-417A-9CAE-69A7D3585B5A}"/>
+                <a16:creationId xmlns:a16="http://schemas.microsoft.com/office/drawing/2014/main" id="{304CD5F0-B9CE-4E1B-A6DD-2F7C3CE81E69}"/>
               </a:ext>
             </a:extLst>
           </p:cNvPr>
@@ -12341,7 +12349,7 @@
           <p:cNvPr id="12" name="">
             <a:extLst xmlns:a="http://schemas.openxmlformats.org/drawingml/2006/main">
               <a:ext uri="{FF2B5EF4-FFF2-40B4-BE49-F238E27FC236}">
-                <a16:creationId xmlns:a16="http://schemas.microsoft.com/office/drawing/2014/main" id="{FB1C660C-F4C0-4B41-B8E4-E8AB40A76E4F}"/>
+                <a16:creationId xmlns:a16="http://schemas.microsoft.com/office/drawing/2014/main" id="{779CBE2D-780A-4525-8D9D-077A08FF5EEE}"/>
               </a:ext>
             </a:extLst>
           </p:cNvPr>
@@ -12398,7 +12406,7 @@
           <p:cNvPr id="13" name="">
             <a:extLst xmlns:a="http://schemas.openxmlformats.org/drawingml/2006/main">
               <a:ext uri="{FF2B5EF4-FFF2-40B4-BE49-F238E27FC236}">
-                <a16:creationId xmlns:a16="http://schemas.microsoft.com/office/drawing/2014/main" id="{E80789D9-5361-4CE7-86F0-CE68B9C0DBE7}"/>
+                <a16:creationId xmlns:a16="http://schemas.microsoft.com/office/drawing/2014/main" id="{87F1F82E-F9AC-46FA-89E9-41D75D545DAC}"/>
               </a:ext>
             </a:extLst>
           </p:cNvPr>
@@ -12455,7 +12463,7 @@
           <p:cNvPr id="14" name="">
             <a:extLst xmlns:a="http://schemas.openxmlformats.org/drawingml/2006/main">
               <a:ext uri="{FF2B5EF4-FFF2-40B4-BE49-F238E27FC236}">
-                <a16:creationId xmlns:a16="http://schemas.microsoft.com/office/drawing/2014/main" id="{64ACC79F-72F4-4A1C-BC02-F5203DEC3C55}"/>
+                <a16:creationId xmlns:a16="http://schemas.microsoft.com/office/drawing/2014/main" id="{004ECB93-D179-47E5-B803-49A13F37C8C2}"/>
               </a:ext>
             </a:extLst>
           </p:cNvPr>
@@ -12489,7 +12497,7 @@
           <p:cNvPr id="15" name="">
             <a:extLst xmlns:a="http://schemas.openxmlformats.org/drawingml/2006/main">
               <a:ext uri="{FF2B5EF4-FFF2-40B4-BE49-F238E27FC236}">
-                <a16:creationId xmlns:a16="http://schemas.microsoft.com/office/drawing/2014/main" id="{4717D62C-D1AB-4F97-ACAD-4F361871061F}"/>
+                <a16:creationId xmlns:a16="http://schemas.microsoft.com/office/drawing/2014/main" id="{1A13119F-65DD-444E-B12C-C862AE24F1BC}"/>
               </a:ext>
             </a:extLst>
           </p:cNvPr>
@@ -12521,7 +12529,7 @@
           <p:cNvPr id="16" name="">
             <a:extLst xmlns:a="http://schemas.openxmlformats.org/drawingml/2006/main">
               <a:ext uri="{FF2B5EF4-FFF2-40B4-BE49-F238E27FC236}">
-                <a16:creationId xmlns:a16="http://schemas.microsoft.com/office/drawing/2014/main" id="{A792658A-352B-49D7-BA41-C841F8F27988}"/>
+                <a16:creationId xmlns:a16="http://schemas.microsoft.com/office/drawing/2014/main" id="{DA1CF557-28E9-4CF4-B917-243104817DFC}"/>
               </a:ext>
             </a:extLst>
           </p:cNvPr>
@@ -12578,7 +12586,7 @@
           <p:cNvPr id="17" name="">
             <a:extLst xmlns:a="http://schemas.openxmlformats.org/drawingml/2006/main">
               <a:ext uri="{FF2B5EF4-FFF2-40B4-BE49-F238E27FC236}">
-                <a16:creationId xmlns:a16="http://schemas.microsoft.com/office/drawing/2014/main" id="{2984EA15-94D6-480A-AB9A-48AE310A86C1}"/>
+                <a16:creationId xmlns:a16="http://schemas.microsoft.com/office/drawing/2014/main" id="{CFA6AA6D-2210-4EA7-8BE8-20D7AF10A787}"/>
               </a:ext>
             </a:extLst>
           </p:cNvPr>
@@ -12635,7 +12643,7 @@
           <p:cNvPr id="18" name="">
             <a:extLst xmlns:a="http://schemas.openxmlformats.org/drawingml/2006/main">
               <a:ext uri="{FF2B5EF4-FFF2-40B4-BE49-F238E27FC236}">
-                <a16:creationId xmlns:a16="http://schemas.microsoft.com/office/drawing/2014/main" id="{337F8D76-8378-407B-86F7-69A859C9FC4C}"/>
+                <a16:creationId xmlns:a16="http://schemas.microsoft.com/office/drawing/2014/main" id="{D2CF79C7-9BFA-4D2C-9DC0-1C9792D798CF}"/>
               </a:ext>
             </a:extLst>
           </p:cNvPr>
@@ -12669,7 +12677,7 @@
           <p:cNvPr id="19" name="">
             <a:extLst xmlns:a="http://schemas.openxmlformats.org/drawingml/2006/main">
               <a:ext uri="{FF2B5EF4-FFF2-40B4-BE49-F238E27FC236}">
-                <a16:creationId xmlns:a16="http://schemas.microsoft.com/office/drawing/2014/main" id="{80C99401-201D-4AA2-96F9-EA8387B90680}"/>
+                <a16:creationId xmlns:a16="http://schemas.microsoft.com/office/drawing/2014/main" id="{FCD74153-3FA1-4AB0-9E90-862ED8E0800A}"/>
               </a:ext>
             </a:extLst>
           </p:cNvPr>
@@ -12701,7 +12709,7 @@
           <p:cNvPr id="20" name="">
             <a:extLst xmlns:a="http://schemas.openxmlformats.org/drawingml/2006/main">
               <a:ext uri="{FF2B5EF4-FFF2-40B4-BE49-F238E27FC236}">
-                <a16:creationId xmlns:a16="http://schemas.microsoft.com/office/drawing/2014/main" id="{C4DDCE1D-5B41-41BE-BBCB-21AE8320DFD2}"/>
+                <a16:creationId xmlns:a16="http://schemas.microsoft.com/office/drawing/2014/main" id="{0999A5B4-A637-402E-8972-C2A6428E5C36}"/>
               </a:ext>
             </a:extLst>
           </p:cNvPr>
@@ -12758,7 +12766,7 @@
           <p:cNvPr id="21" name="">
             <a:extLst xmlns:a="http://schemas.openxmlformats.org/drawingml/2006/main">
               <a:ext uri="{FF2B5EF4-FFF2-40B4-BE49-F238E27FC236}">
-                <a16:creationId xmlns:a16="http://schemas.microsoft.com/office/drawing/2014/main" id="{44E40AD6-A1C2-4B89-9C08-2834AEA33018}"/>
+                <a16:creationId xmlns:a16="http://schemas.microsoft.com/office/drawing/2014/main" id="{17044D3F-4A9A-4062-80E9-15DDB88A282A}"/>
               </a:ext>
             </a:extLst>
           </p:cNvPr>
@@ -12815,7 +12823,7 @@
           <p:cNvPr id="22" name="">
             <a:extLst xmlns:a="http://schemas.openxmlformats.org/drawingml/2006/main">
               <a:ext uri="{FF2B5EF4-FFF2-40B4-BE49-F238E27FC236}">
-                <a16:creationId xmlns:a16="http://schemas.microsoft.com/office/drawing/2014/main" id="{C90C4F42-FFA7-45B3-B05B-C4DDDCE10862}"/>
+                <a16:creationId xmlns:a16="http://schemas.microsoft.com/office/drawing/2014/main" id="{BD56EF6C-01BA-445E-A261-99BEF853F6D0}"/>
               </a:ext>
             </a:extLst>
           </p:cNvPr>
@@ -12870,7 +12878,7 @@
     </p:spTree>
     <p:extLst>
       <p:ext uri="{BB962C8B-B14F-4D97-AF65-F5344CB8AC3E}">
-        <p14:creationId xmlns:p14="http://schemas.microsoft.com/office/powerpoint/2010/main" val="1707672674"/>
+        <p14:creationId xmlns:p14="http://schemas.microsoft.com/office/powerpoint/2010/main" val="1229868480"/>
       </p:ext>
     </p:extLst>
   </p:cSld>
@@ -13071,7 +13079,7 @@
           <p:cNvPr id="22" name="">
             <a:extLst xmlns:a="http://schemas.openxmlformats.org/drawingml/2006/main">
               <a:ext uri="{FF2B5EF4-FFF2-40B4-BE49-F238E27FC236}">
-                <a16:creationId xmlns:a16="http://schemas.microsoft.com/office/drawing/2014/main" id="{E8DAEB7A-7B3D-4907-B410-6CEC3E6899AF}"/>
+                <a16:creationId xmlns:a16="http://schemas.microsoft.com/office/drawing/2014/main" id="{E0B2AEBC-57F3-4222-B361-B3E908B250DE}"/>
               </a:ext>
             </a:extLst>
           </p:cNvPr>
@@ -13103,7 +13111,7 @@
           <p:cNvPr id="2" name="">
             <a:extLst xmlns:a="http://schemas.openxmlformats.org/drawingml/2006/main">
               <a:ext uri="{FF2B5EF4-FFF2-40B4-BE49-F238E27FC236}">
-                <a16:creationId xmlns:a16="http://schemas.microsoft.com/office/drawing/2014/main" id="{72160994-38AB-409D-BE6D-9861C7DDEF1D}"/>
+                <a16:creationId xmlns:a16="http://schemas.microsoft.com/office/drawing/2014/main" id="{F76A21FA-0C8E-49E2-9850-7AB37EA629C7}"/>
               </a:ext>
             </a:extLst>
           </p:cNvPr>
@@ -13160,7 +13168,7 @@
           <p:cNvPr id="3" name="">
             <a:extLst xmlns:a="http://schemas.openxmlformats.org/drawingml/2006/main">
               <a:ext uri="{FF2B5EF4-FFF2-40B4-BE49-F238E27FC236}">
-                <a16:creationId xmlns:a16="http://schemas.microsoft.com/office/drawing/2014/main" id="{3CDDEE2B-A6AF-4134-9AE0-ACE34B65EF46}"/>
+                <a16:creationId xmlns:a16="http://schemas.microsoft.com/office/drawing/2014/main" id="{FE6B4C72-58AA-4B1D-AA57-B0E16B2BE1D5}"/>
               </a:ext>
             </a:extLst>
           </p:cNvPr>
@@ -13192,7 +13200,7 @@
           <p:cNvPr id="4" name="">
             <a:extLst xmlns:a="http://schemas.openxmlformats.org/drawingml/2006/main">
               <a:ext uri="{FF2B5EF4-FFF2-40B4-BE49-F238E27FC236}">
-                <a16:creationId xmlns:a16="http://schemas.microsoft.com/office/drawing/2014/main" id="{3FE02A40-48FA-4527-A6EF-E4574F792945}"/>
+                <a16:creationId xmlns:a16="http://schemas.microsoft.com/office/drawing/2014/main" id="{304F1386-70FB-4A54-A205-72396C94A04B}"/>
               </a:ext>
             </a:extLst>
           </p:cNvPr>
@@ -13249,7 +13257,7 @@
           <p:cNvPr id="5" name="">
             <a:extLst xmlns:a="http://schemas.openxmlformats.org/drawingml/2006/main">
               <a:ext uri="{FF2B5EF4-FFF2-40B4-BE49-F238E27FC236}">
-                <a16:creationId xmlns:a16="http://schemas.microsoft.com/office/drawing/2014/main" id="{62835BFF-75B7-40DE-B24F-B8D23895DC0B}"/>
+                <a16:creationId xmlns:a16="http://schemas.microsoft.com/office/drawing/2014/main" id="{81D42858-80E3-4D3D-AD50-09F78C1DA41C}"/>
               </a:ext>
             </a:extLst>
           </p:cNvPr>
@@ -13306,7 +13314,7 @@
           <p:cNvPr id="6" name="">
             <a:extLst xmlns:a="http://schemas.openxmlformats.org/drawingml/2006/main">
               <a:ext uri="{FF2B5EF4-FFF2-40B4-BE49-F238E27FC236}">
-                <a16:creationId xmlns:a16="http://schemas.microsoft.com/office/drawing/2014/main" id="{BB2F5179-CB51-4C10-B9B4-1D3A3C395E4A}"/>
+                <a16:creationId xmlns:a16="http://schemas.microsoft.com/office/drawing/2014/main" id="{96187F94-658B-41E1-8DB7-A90A93AE4C41}"/>
               </a:ext>
             </a:extLst>
           </p:cNvPr>
@@ -13363,7 +13371,7 @@
           <p:cNvPr id="7" name="">
             <a:extLst xmlns:a="http://schemas.openxmlformats.org/drawingml/2006/main">
               <a:ext uri="{FF2B5EF4-FFF2-40B4-BE49-F238E27FC236}">
-                <a16:creationId xmlns:a16="http://schemas.microsoft.com/office/drawing/2014/main" id="{49D0C91D-2499-407F-9534-F6A1D5BD1563}"/>
+                <a16:creationId xmlns:a16="http://schemas.microsoft.com/office/drawing/2014/main" id="{95C89653-934F-4B52-8395-4274E3FD4984}"/>
               </a:ext>
             </a:extLst>
           </p:cNvPr>
@@ -13395,7 +13403,7 @@
           <p:cNvPr id="8" name="">
             <a:extLst xmlns:a="http://schemas.openxmlformats.org/drawingml/2006/main">
               <a:ext uri="{FF2B5EF4-FFF2-40B4-BE49-F238E27FC236}">
-                <a16:creationId xmlns:a16="http://schemas.microsoft.com/office/drawing/2014/main" id="{D12A7EE5-1595-4014-A562-A9961C46C863}"/>
+                <a16:creationId xmlns:a16="http://schemas.microsoft.com/office/drawing/2014/main" id="{088A6A5F-35D3-478C-A565-BFA5D4539E64}"/>
               </a:ext>
             </a:extLst>
           </p:cNvPr>
@@ -13452,7 +13460,7 @@
           <p:cNvPr id="9" name="">
             <a:extLst xmlns:a="http://schemas.openxmlformats.org/drawingml/2006/main">
               <a:ext uri="{FF2B5EF4-FFF2-40B4-BE49-F238E27FC236}">
-                <a16:creationId xmlns:a16="http://schemas.microsoft.com/office/drawing/2014/main" id="{6A63F4FC-2EF4-46B6-AB3A-9ED5ADD0897A}"/>
+                <a16:creationId xmlns:a16="http://schemas.microsoft.com/office/drawing/2014/main" id="{81D97DD5-6F85-4B48-A93B-0386FF690DEB}"/>
               </a:ext>
             </a:extLst>
           </p:cNvPr>
@@ -13509,7 +13517,7 @@
           <p:cNvPr id="10" name="">
             <a:extLst xmlns:a="http://schemas.openxmlformats.org/drawingml/2006/main">
               <a:ext uri="{FF2B5EF4-FFF2-40B4-BE49-F238E27FC236}">
-                <a16:creationId xmlns:a16="http://schemas.microsoft.com/office/drawing/2014/main" id="{214FABA0-5318-4831-BEC0-D0E53D3ABC95}"/>
+                <a16:creationId xmlns:a16="http://schemas.microsoft.com/office/drawing/2014/main" id="{935C6F23-856C-4792-94F2-4944D570EBF7}"/>
               </a:ext>
             </a:extLst>
           </p:cNvPr>
@@ -13543,7 +13551,7 @@
           <p:cNvPr id="11" name="">
             <a:extLst xmlns:a="http://schemas.openxmlformats.org/drawingml/2006/main">
               <a:ext uri="{FF2B5EF4-FFF2-40B4-BE49-F238E27FC236}">
-                <a16:creationId xmlns:a16="http://schemas.microsoft.com/office/drawing/2014/main" id="{D403E228-EC3F-45AE-8112-2A05660AA998}"/>
+                <a16:creationId xmlns:a16="http://schemas.microsoft.com/office/drawing/2014/main" id="{71DB7B13-BCC9-443A-A767-7B6B1CAE73FD}"/>
               </a:ext>
             </a:extLst>
           </p:cNvPr>
@@ -13575,7 +13583,7 @@
           <p:cNvPr id="12" name="">
             <a:extLst xmlns:a="http://schemas.openxmlformats.org/drawingml/2006/main">
               <a:ext uri="{FF2B5EF4-FFF2-40B4-BE49-F238E27FC236}">
-                <a16:creationId xmlns:a16="http://schemas.microsoft.com/office/drawing/2014/main" id="{4A411361-01F3-47AD-BE94-8E7DF8AB940C}"/>
+                <a16:creationId xmlns:a16="http://schemas.microsoft.com/office/drawing/2014/main" id="{B0686370-60EB-479D-8177-9148CAA2BD06}"/>
               </a:ext>
             </a:extLst>
           </p:cNvPr>
@@ -13632,7 +13640,7 @@
           <p:cNvPr id="13" name="">
             <a:extLst xmlns:a="http://schemas.openxmlformats.org/drawingml/2006/main">
               <a:ext uri="{FF2B5EF4-FFF2-40B4-BE49-F238E27FC236}">
-                <a16:creationId xmlns:a16="http://schemas.microsoft.com/office/drawing/2014/main" id="{CF9B34D5-1C70-43FB-8FB8-7B005191973C}"/>
+                <a16:creationId xmlns:a16="http://schemas.microsoft.com/office/drawing/2014/main" id="{E5E030D2-BF93-4E1B-86A7-B955C8221AB0}"/>
               </a:ext>
             </a:extLst>
           </p:cNvPr>
@@ -13689,7 +13697,7 @@
           <p:cNvPr id="14" name="">
             <a:extLst xmlns:a="http://schemas.openxmlformats.org/drawingml/2006/main">
               <a:ext uri="{FF2B5EF4-FFF2-40B4-BE49-F238E27FC236}">
-                <a16:creationId xmlns:a16="http://schemas.microsoft.com/office/drawing/2014/main" id="{2CAE35E0-813C-4965-9624-A105B52C38D8}"/>
+                <a16:creationId xmlns:a16="http://schemas.microsoft.com/office/drawing/2014/main" id="{E056D80C-B3CB-4615-9E77-C8C30E06C376}"/>
               </a:ext>
             </a:extLst>
           </p:cNvPr>
@@ -13723,7 +13731,7 @@
           <p:cNvPr id="15" name="">
             <a:extLst xmlns:a="http://schemas.openxmlformats.org/drawingml/2006/main">
               <a:ext uri="{FF2B5EF4-FFF2-40B4-BE49-F238E27FC236}">
-                <a16:creationId xmlns:a16="http://schemas.microsoft.com/office/drawing/2014/main" id="{947CB2A8-E752-4E37-9D8C-81F1FB843B1B}"/>
+                <a16:creationId xmlns:a16="http://schemas.microsoft.com/office/drawing/2014/main" id="{F40110B8-5471-4F08-AD4F-E468E6406C07}"/>
               </a:ext>
             </a:extLst>
           </p:cNvPr>
@@ -13755,7 +13763,7 @@
           <p:cNvPr id="16" name="">
             <a:extLst xmlns:a="http://schemas.openxmlformats.org/drawingml/2006/main">
               <a:ext uri="{FF2B5EF4-FFF2-40B4-BE49-F238E27FC236}">
-                <a16:creationId xmlns:a16="http://schemas.microsoft.com/office/drawing/2014/main" id="{CC4D3EA7-80F7-43BF-A2F7-215C7B5D7BF4}"/>
+                <a16:creationId xmlns:a16="http://schemas.microsoft.com/office/drawing/2014/main" id="{20C46FF2-3F8F-4859-9399-A9B40925E0C7}"/>
               </a:ext>
             </a:extLst>
           </p:cNvPr>
@@ -13812,7 +13820,7 @@
           <p:cNvPr id="17" name="">
             <a:extLst xmlns:a="http://schemas.openxmlformats.org/drawingml/2006/main">
               <a:ext uri="{FF2B5EF4-FFF2-40B4-BE49-F238E27FC236}">
-                <a16:creationId xmlns:a16="http://schemas.microsoft.com/office/drawing/2014/main" id="{A4C258A1-26EA-43FC-B65E-D7868B69564F}"/>
+                <a16:creationId xmlns:a16="http://schemas.microsoft.com/office/drawing/2014/main" id="{18247DBA-13C3-4DCD-982A-EB9AF71301B8}"/>
               </a:ext>
             </a:extLst>
           </p:cNvPr>
@@ -13869,7 +13877,7 @@
           <p:cNvPr id="18" name="">
             <a:extLst xmlns:a="http://schemas.openxmlformats.org/drawingml/2006/main">
               <a:ext uri="{FF2B5EF4-FFF2-40B4-BE49-F238E27FC236}">
-                <a16:creationId xmlns:a16="http://schemas.microsoft.com/office/drawing/2014/main" id="{4D1A4F16-2C6B-4E7D-8DDA-CE604A4A19D1}"/>
+                <a16:creationId xmlns:a16="http://schemas.microsoft.com/office/drawing/2014/main" id="{ADE259CE-A2BF-4136-AA76-D18743A893D1}"/>
               </a:ext>
             </a:extLst>
           </p:cNvPr>
@@ -13903,7 +13911,7 @@
           <p:cNvPr id="19" name="">
             <a:extLst xmlns:a="http://schemas.openxmlformats.org/drawingml/2006/main">
               <a:ext uri="{FF2B5EF4-FFF2-40B4-BE49-F238E27FC236}">
-                <a16:creationId xmlns:a16="http://schemas.microsoft.com/office/drawing/2014/main" id="{542C3006-73E5-4C47-80BE-6E0078CBE7A4}"/>
+                <a16:creationId xmlns:a16="http://schemas.microsoft.com/office/drawing/2014/main" id="{5020F1F4-5B5F-48C1-90DB-F95B2A0DC4AC}"/>
               </a:ext>
             </a:extLst>
           </p:cNvPr>
@@ -13935,7 +13943,7 @@
           <p:cNvPr id="20" name="">
             <a:extLst xmlns:a="http://schemas.openxmlformats.org/drawingml/2006/main">
               <a:ext uri="{FF2B5EF4-FFF2-40B4-BE49-F238E27FC236}">
-                <a16:creationId xmlns:a16="http://schemas.microsoft.com/office/drawing/2014/main" id="{63D1E1A7-A42C-435E-8EA6-6995D7B265AF}"/>
+                <a16:creationId xmlns:a16="http://schemas.microsoft.com/office/drawing/2014/main" id="{4F482712-FF84-48DF-AFFF-FAC924AC4DC7}"/>
               </a:ext>
             </a:extLst>
           </p:cNvPr>
@@ -13992,7 +14000,7 @@
           <p:cNvPr id="21" name="">
             <a:extLst xmlns:a="http://schemas.openxmlformats.org/drawingml/2006/main">
               <a:ext uri="{FF2B5EF4-FFF2-40B4-BE49-F238E27FC236}">
-                <a16:creationId xmlns:a16="http://schemas.microsoft.com/office/drawing/2014/main" id="{5D7DA0C4-D7DF-4D66-894C-8D7A3376ED3C}"/>
+                <a16:creationId xmlns:a16="http://schemas.microsoft.com/office/drawing/2014/main" id="{7CD0CA13-792D-47AD-9451-A2221E8CEA19}"/>
               </a:ext>
             </a:extLst>
           </p:cNvPr>
@@ -14047,7 +14055,7 @@
     </p:spTree>
     <p:extLst>
       <p:ext uri="{BB962C8B-B14F-4D97-AF65-F5344CB8AC3E}">
-        <p14:creationId xmlns:p14="http://schemas.microsoft.com/office/powerpoint/2010/main" val="740269327"/>
+        <p14:creationId xmlns:p14="http://schemas.microsoft.com/office/powerpoint/2010/main" val="1937213597"/>
       </p:ext>
     </p:extLst>
   </p:cSld>
